--- a/Presentacion_TFM_Daniel_Barrasa.pptx
+++ b/Presentacion_TFM_Daniel_Barrasa.pptx
@@ -13,6 +13,7 @@
     <p:sldId id="261" r:id="rId8"/>
     <p:sldId id="262" r:id="rId9"/>
     <p:sldId id="263" r:id="rId10"/>
+    <p:sldId id="264" r:id="rId11"/>
   </p:sldIdLst>
   <p:sldSz cx="12192000" cy="6858000"/>
   <p:notesSz cx="7559675" cy="10691813"/>
@@ -102,7 +103,18 @@
                 <a:uFillTx/>
                 <a:latin typeface="Calibri"/>
               </a:rPr>
-              <a:t>Click to edit Master title style</a:t>
+              <a:t>Click to edit </a:t>
+            </a:r>
+            <a:r>
+              <a:rPr lang="en-US" sz="4400" b="0" u="none" strike="noStrike">
+                <a:solidFill>
+                  <a:schemeClr val="dk1"/>
+                </a:solidFill>
+                <a:effectLst/>
+                <a:uFillTx/>
+                <a:latin typeface="Calibri"/>
+              </a:rPr>
+              <a:t>Master title style</a:t>
             </a:r>
             <a:endParaRPr lang="en-US" sz="4400" b="0" u="none" strike="noStrike">
               <a:solidFill>
@@ -309,7 +321,7 @@
               </a:lnSpc>
               <a:buNone/>
             </a:pPr>
-            <a:fld id="{8C3F2F97-02C2-439A-940A-F6036767BB31}" type="slidenum">
+            <a:fld id="{E044C7EA-B30F-468F-B5D5-478D20386C61}" type="slidenum">
               <a:rPr lang="en-US" sz="1200" b="0" u="none" strike="noStrike">
                 <a:solidFill>
                   <a:schemeClr val="dk1">
@@ -1018,7 +1030,7 @@
               </a:lnSpc>
               <a:buNone/>
             </a:pPr>
-            <a:fld id="{2B877907-D0E2-4D68-986C-20DB803DECD0}" type="slidenum">
+            <a:fld id="{4701FEF0-D005-402A-82F1-C5FBB64EA8C5}" type="slidenum">
               <a:rPr lang="en-US" sz="1200" b="0" u="none" strike="noStrike">
                 <a:solidFill>
                   <a:schemeClr val="dk1">
@@ -1813,7 +1825,7 @@
               </a:lnSpc>
               <a:buNone/>
             </a:pPr>
-            <a:fld id="{4ADB3861-49FB-4FDC-9380-0E164C362AA3}" type="slidenum">
+            <a:fld id="{21D36F9C-2297-4861-9743-B81D8B02435E}" type="slidenum">
               <a:rPr lang="en-US" sz="1200" b="0" u="none" strike="noStrike">
                 <a:solidFill>
                   <a:schemeClr val="dk1">
@@ -2438,7 +2450,7 @@
               </a:lnSpc>
               <a:buNone/>
             </a:pPr>
-            <a:fld id="{D8511407-387D-4627-8253-516165FEE042}" type="slidenum">
+            <a:fld id="{D948EA5C-8E7D-4BE4-87AB-D06DEF772A3C}" type="slidenum">
               <a:rPr lang="en-US" sz="1200" b="0" u="none" strike="noStrike">
                 <a:solidFill>
                   <a:schemeClr val="dk1">
@@ -3063,7 +3075,7 @@
               </a:lnSpc>
               <a:buNone/>
             </a:pPr>
-            <a:fld id="{370D186F-752D-443F-A194-B9EFC859746F}" type="slidenum">
+            <a:fld id="{FC3EA6BE-67BF-4625-84E2-2A195BFA6290}" type="slidenum">
               <a:rPr lang="en-US" sz="1200" b="0" u="none" strike="noStrike">
                 <a:solidFill>
                   <a:schemeClr val="dk1">
@@ -3688,7 +3700,7 @@
               </a:lnSpc>
               <a:buNone/>
             </a:pPr>
-            <a:fld id="{8D96A495-5ED1-4443-A101-20A03272FB32}" type="slidenum">
+            <a:fld id="{B24BAE29-270D-4871-8759-61ECA27FA347}" type="slidenum">
               <a:rPr lang="en-US" sz="1200" b="0" u="none" strike="noStrike">
                 <a:solidFill>
                   <a:schemeClr val="dk1">
@@ -4097,7 +4109,7 @@
               </a:lnSpc>
               <a:buNone/>
             </a:pPr>
-            <a:fld id="{4BF61FFF-02DA-4B6B-A826-01882A51492A}" type="slidenum">
+            <a:fld id="{56C7FDC4-FE64-41CB-972B-39E8DC5EAC05}" type="slidenum">
               <a:rPr lang="en-US" sz="1200" b="0" u="none" strike="noStrike">
                 <a:solidFill>
                   <a:schemeClr val="dk1">
@@ -5028,7 +5040,7 @@
               </a:lnSpc>
               <a:buNone/>
             </a:pPr>
-            <a:fld id="{29A1508A-E9B8-4716-889A-E503AE62C647}" type="slidenum">
+            <a:fld id="{D038A231-3DC2-472D-B076-1C31482676EC}" type="slidenum">
               <a:rPr lang="en-US" sz="1200" b="0" u="none" strike="noStrike">
                 <a:solidFill>
                   <a:schemeClr val="dk1">
@@ -6187,7 +6199,7 @@
               </a:lnSpc>
               <a:buNone/>
             </a:pPr>
-            <a:fld id="{0CC7B47A-6A59-4A6C-905C-230930DDE874}" type="slidenum">
+            <a:fld id="{218CA5DA-D4F6-4693-A56D-66ED4B3DCAFA}" type="slidenum">
               <a:rPr lang="en-US" sz="1200" b="0" u="none" strike="noStrike">
                 <a:solidFill>
                   <a:schemeClr val="dk1">
@@ -6506,7 +6518,7 @@
               </a:lnSpc>
               <a:buNone/>
             </a:pPr>
-            <a:fld id="{41D0C039-1087-418C-99F0-12286A37FDFA}" type="slidenum">
+            <a:fld id="{C0009F93-D8B2-425F-BA3D-A508BBF2E535}" type="slidenum">
               <a:rPr lang="en-US" sz="1200" b="0" u="none" strike="noStrike">
                 <a:solidFill>
                   <a:schemeClr val="dk1">
@@ -6753,7 +6765,7 @@
               </a:lnSpc>
               <a:buNone/>
             </a:pPr>
-            <a:fld id="{5D5B8E6B-50C8-48C5-B502-5EB38F8130D1}" type="slidenum">
+            <a:fld id="{6CB0DC38-A339-475E-8E86-E0314D90B677}" type="slidenum">
               <a:rPr lang="en-US" sz="1200" b="0" u="none" strike="noStrike">
                 <a:solidFill>
                   <a:schemeClr val="dk1">
@@ -7303,7 +7315,7 @@
         <p:spPr>
           <a:xfrm>
             <a:off x="914400" y="2011680"/>
-            <a:ext cx="10362600" cy="3657240"/>
+            <a:ext cx="10362600" cy="2087280"/>
           </a:xfrm>
           <a:prstGeom prst="rect">
             <a:avLst/>
@@ -7333,7 +7345,7 @@
               </a:spcAft>
             </a:pPr>
             <a:r>
-              <a:rPr lang="en-US" sz="4600" b="0" u="none" strike="noStrike">
+              <a:rPr lang="es-ES" sz="4600" b="0" u="none" strike="noStrike">
                 <a:solidFill>
                   <a:srgbClr val="FFFFFF"/>
                 </a:solidFill>
@@ -7362,7 +7374,7 @@
               </a:spcAft>
             </a:pPr>
             <a:r>
-              <a:rPr lang="en-US" sz="2000" b="0" u="none" strike="noStrike">
+              <a:rPr lang="es-ES" sz="2000" b="0" u="none" strike="noStrike">
                 <a:solidFill>
                   <a:srgbClr val="B8860B"/>
                 </a:solidFill>
@@ -7388,7 +7400,7 @@
               </a:lnSpc>
             </a:pPr>
             <a:r>
-              <a:rPr lang="en-US" sz="1500" b="0" u="none" strike="noStrike">
+              <a:rPr lang="es-ES" sz="1500" b="0" u="none" strike="noStrike">
                 <a:solidFill>
                   <a:srgbClr val="FFFFFF"/>
                 </a:solidFill>
@@ -7402,7 +7414,7 @@
               <a:rPr sz="1500"/>
             </a:br>
             <a:r>
-              <a:rPr lang="en-US" sz="1500" b="0" u="none" strike="noStrike">
+              <a:rPr lang="es-ES" sz="1500" b="0" u="none" strike="noStrike">
                 <a:solidFill>
                   <a:srgbClr val="FFFFFF"/>
                 </a:solidFill>
@@ -7469,7 +7481,7 @@
         <p:spPr>
           <a:xfrm>
             <a:off x="731520" y="365760"/>
-            <a:ext cx="10728360" cy="731160"/>
+            <a:ext cx="10728360" cy="517320"/>
           </a:xfrm>
           <a:prstGeom prst="rect">
             <a:avLst/>
@@ -7486,7 +7498,7 @@
           <a:fontRef idx="minor"/>
         </p:style>
         <p:txBody>
-          <a:bodyPr lIns="0" tIns="0" rIns="90000" bIns="45000" anchor="t">
+          <a:bodyPr lIns="90000" tIns="45000" rIns="90000" bIns="45000" anchor="t">
             <a:spAutoFit/>
           </a:bodyPr>
           <a:p>
@@ -7496,7 +7508,7 @@
               </a:lnSpc>
             </a:pPr>
             <a:r>
-              <a:rPr lang="en-US" sz="2800" b="0" u="none" strike="noStrike">
+              <a:rPr lang="es-ES" sz="2800" b="0" u="none" strike="noStrike">
                 <a:solidFill>
                   <a:srgbClr val="1E3A5F"/>
                 </a:solidFill>
@@ -7525,8 +7537,8 @@
         </p:nvSpPr>
         <p:spPr>
           <a:xfrm>
-            <a:off x="731520" y="1188720"/>
-            <a:ext cx="10728360" cy="27000"/>
+            <a:off x="731520" y="1097280"/>
+            <a:ext cx="10728360" cy="18000"/>
           </a:xfrm>
           <a:prstGeom prst="rect">
             <a:avLst/>
@@ -7535,8 +7547,66 @@
             <a:srgbClr val="B8860B"/>
           </a:solidFill>
           <a:ln>
+            <a:noFill/>
+          </a:ln>
+          <a:effectLst>
+            <a:outerShdw blurRad="39960" dir="5400000" dist="23040" rotWithShape="0">
+              <a:srgbClr val="000000">
+                <a:alpha val="35000"/>
+              </a:srgbClr>
+            </a:outerShdw>
+          </a:effectLst>
+        </p:spPr>
+        <p:style>
+          <a:lnRef idx="1">
+            <a:schemeClr val="accent1"/>
+          </a:lnRef>
+          <a:fillRef idx="3">
+            <a:schemeClr val="accent1"/>
+          </a:fillRef>
+          <a:effectRef idx="2">
+            <a:schemeClr val="accent1"/>
+          </a:effectRef>
+          <a:fontRef idx="minor"/>
+        </p:style>
+        <p:txBody>
+          <a:bodyPr lIns="90000" tIns="-26640" rIns="90000" bIns="-26640" anchor="ctr">
+            <a:noAutofit/>
+          </a:bodyPr>
+          <a:p>
+            <a:endParaRPr lang="es-ES" sz="1800" b="0" u="none" strike="noStrike">
+              <a:solidFill>
+                <a:schemeClr val="lt1"/>
+              </a:solidFill>
+              <a:effectLst/>
+              <a:uFillTx/>
+              <a:latin typeface="Calibri"/>
+            </a:endParaRPr>
+          </a:p>
+        </p:txBody>
+      </p:sp>
+      <p:sp>
+        <p:nvSpPr>
+          <p:cNvPr id="64" name="Rounded Rectangle 3"/>
+          <p:cNvSpPr/>
+          <p:nvPr/>
+        </p:nvSpPr>
+        <p:spPr>
+          <a:xfrm>
+            <a:off x="731520" y="1463040"/>
+            <a:ext cx="5120280" cy="4754520"/>
+          </a:xfrm>
+          <a:prstGeom prst="roundRect">
+            <a:avLst>
+              <a:gd name="adj" fmla="val 16667"/>
+            </a:avLst>
+          </a:prstGeom>
+          <a:solidFill>
+            <a:srgbClr val="FFFFFF"/>
+          </a:solidFill>
+          <a:ln w="12700">
             <a:solidFill>
-              <a:srgbClr val="B8860B"/>
+              <a:srgbClr val="E6D7B4"/>
             </a:solidFill>
             <a:round/>
           </a:ln>
@@ -7561,11 +7631,11 @@
           <a:fontRef idx="minor"/>
         </p:style>
         <p:txBody>
-          <a:bodyPr lIns="90000" tIns="-17640" rIns="90000" bIns="-17640" anchor="ctr">
+          <a:bodyPr lIns="90000" tIns="45000" rIns="90000" bIns="45000" anchor="ctr">
             <a:noAutofit/>
           </a:bodyPr>
           <a:p>
-            <a:endParaRPr lang="en-US" sz="1800" b="0" u="none" strike="noStrike">
+            <a:endParaRPr lang="es-ES" sz="1800" b="0" u="none" strike="noStrike">
               <a:solidFill>
                 <a:schemeClr val="lt1"/>
               </a:solidFill>
@@ -7578,14 +7648,14 @@
       </p:sp>
       <p:sp>
         <p:nvSpPr>
-          <p:cNvPr id="64" name="TextBox 3"/>
+          <p:cNvPr id="65" name="TextBox 4"/>
           <p:cNvSpPr/>
           <p:nvPr/>
         </p:nvSpPr>
         <p:spPr>
           <a:xfrm>
-            <a:off x="731520" y="1554480"/>
-            <a:ext cx="10728360" cy="4754520"/>
+            <a:off x="914400" y="1645920"/>
+            <a:ext cx="4754520" cy="2144160"/>
           </a:xfrm>
           <a:prstGeom prst="rect">
             <a:avLst/>
@@ -7602,7 +7672,7 @@
           <a:fontRef idx="minor"/>
         </p:style>
         <p:txBody>
-          <a:bodyPr lIns="0" tIns="0" rIns="0" bIns="0" anchor="t">
+          <a:bodyPr lIns="90000" tIns="45000" rIns="90000" bIns="45000" anchor="t">
             <a:spAutoFit/>
           </a:bodyPr>
           <a:p>
@@ -7611,11 +7681,40 @@
                 <a:spcPct val="100000"/>
               </a:lnSpc>
               <a:spcAft>
-                <a:spcPts val="1199"/>
+                <a:spcPts val="799"/>
               </a:spcAft>
             </a:pPr>
             <a:r>
-              <a:rPr lang="en-US" sz="1400" b="0" u="none" strike="noStrike">
+              <a:rPr lang="es-ES" sz="1400" b="0" u="none" strike="noStrike">
+                <a:solidFill>
+                  <a:srgbClr val="1E3A5F"/>
+                </a:solidFill>
+                <a:effectLst/>
+                <a:uFillTx/>
+                <a:latin typeface="Arial"/>
+              </a:rPr>
+              <a:t>Enlaces e Inscripción</a:t>
+            </a:r>
+            <a:endParaRPr lang="es-ES" sz="1400" b="0" u="none" strike="noStrike">
+              <a:solidFill>
+                <a:srgbClr val="000000"/>
+              </a:solidFill>
+              <a:effectLst/>
+              <a:uFillTx/>
+              <a:latin typeface="Arial"/>
+            </a:endParaRPr>
+          </a:p>
+          <a:p>
+            <a:pPr defTabSz="457200">
+              <a:lnSpc>
+                <a:spcPct val="100000"/>
+              </a:lnSpc>
+              <a:spcAft>
+                <a:spcPts val="601"/>
+              </a:spcAft>
+            </a:pPr>
+            <a:r>
+              <a:rPr lang="es-ES" sz="1100" b="0" u="none" strike="noStrike">
                 <a:solidFill>
                   <a:srgbClr val="28323C"/>
                 </a:solidFill>
@@ -7623,7 +7722,269 @@
                 <a:uFillTx/>
                 <a:latin typeface="Arial"/>
               </a:rPr>
-              <a:t>• Dirección web del despliegue oficial en la nube: https://mi-estanteria-digital.streamlit.app/</a:t>
+              <a:t>• Dirección web del despliegue oficial en la nube:</a:t>
+            </a:r>
+            <a:br>
+              <a:rPr sz="1100"/>
+            </a:br>
+            <a:r>
+              <a:rPr lang="es-ES" sz="1100" b="0" u="none" strike="noStrike">
+                <a:solidFill>
+                  <a:srgbClr val="28323C"/>
+                </a:solidFill>
+                <a:effectLst/>
+                <a:uFillTx/>
+                <a:latin typeface="Arial"/>
+              </a:rPr>
+              <a:t>  </a:t>
+            </a:r>
+            <a:r>
+              <a:rPr lang="es-ES" sz="1100" b="0" u="none" strike="noStrike">
+                <a:solidFill>
+                  <a:srgbClr val="28323C"/>
+                </a:solidFill>
+                <a:effectLst/>
+                <a:uFillTx/>
+                <a:latin typeface="Arial"/>
+                <a:hlinkClick r:id="rId1"/>
+              </a:rPr>
+              <a:t>https://mi-estanteria-digital.streamlit.app/</a:t>
+            </a:r>
+            <a:endParaRPr lang="es-ES" sz="1100" b="0" u="none" strike="noStrike">
+              <a:solidFill>
+                <a:srgbClr val="000000"/>
+              </a:solidFill>
+              <a:effectLst/>
+              <a:uFillTx/>
+              <a:latin typeface="Arial"/>
+            </a:endParaRPr>
+          </a:p>
+          <a:p>
+            <a:pPr defTabSz="457200">
+              <a:lnSpc>
+                <a:spcPct val="100000"/>
+              </a:lnSpc>
+              <a:spcAft>
+                <a:spcPts val="601"/>
+              </a:spcAft>
+            </a:pPr>
+            <a:r>
+              <a:rPr lang="es-ES" sz="1100" b="0" u="none" strike="noStrike">
+                <a:solidFill>
+                  <a:srgbClr val="28323C"/>
+                </a:solidFill>
+                <a:effectLst/>
+                <a:uFillTx/>
+                <a:latin typeface="Arial"/>
+              </a:rPr>
+              <a:t>• Correo electrónico de inscripción del alumno:</a:t>
+            </a:r>
+            <a:br>
+              <a:rPr sz="1100"/>
+            </a:br>
+            <a:r>
+              <a:rPr lang="es-ES" sz="1100" b="0" u="none" strike="noStrike">
+                <a:solidFill>
+                  <a:srgbClr val="28323C"/>
+                </a:solidFill>
+                <a:effectLst/>
+                <a:uFillTx/>
+                <a:latin typeface="Arial"/>
+              </a:rPr>
+              <a:t>  danibarrasa74@gmail.com</a:t>
+            </a:r>
+            <a:endParaRPr lang="es-ES" sz="1100" b="0" u="none" strike="noStrike">
+              <a:solidFill>
+                <a:srgbClr val="000000"/>
+              </a:solidFill>
+              <a:effectLst/>
+              <a:uFillTx/>
+              <a:latin typeface="Arial"/>
+            </a:endParaRPr>
+          </a:p>
+          <a:p>
+            <a:pPr defTabSz="457200">
+              <a:lnSpc>
+                <a:spcPct val="100000"/>
+              </a:lnSpc>
+              <a:spcAft>
+                <a:spcPts val="601"/>
+              </a:spcAft>
+            </a:pPr>
+            <a:r>
+              <a:rPr lang="es-ES" sz="1100" b="0" u="none" strike="noStrike">
+                <a:solidFill>
+                  <a:srgbClr val="28323C"/>
+                </a:solidFill>
+                <a:effectLst/>
+                <a:uFillTx/>
+                <a:latin typeface="Arial"/>
+              </a:rPr>
+              <a:t>• Parámetros de la cuenta de pruebas predeterminada:</a:t>
+            </a:r>
+            <a:br>
+              <a:rPr sz="1100"/>
+            </a:br>
+            <a:r>
+              <a:rPr lang="es-ES" sz="1100" b="0" u="none" strike="noStrike">
+                <a:solidFill>
+                  <a:srgbClr val="28323C"/>
+                </a:solidFill>
+                <a:effectLst/>
+                <a:uFillTx/>
+                <a:latin typeface="Arial"/>
+              </a:rPr>
+              <a:t>  Se especifican en las diapositivas de soporte del TFM de forma confidencial.</a:t>
+            </a:r>
+            <a:endParaRPr lang="es-ES" sz="1100" b="0" u="none" strike="noStrike">
+              <a:solidFill>
+                <a:srgbClr val="000000"/>
+              </a:solidFill>
+              <a:effectLst/>
+              <a:uFillTx/>
+              <a:latin typeface="Arial"/>
+            </a:endParaRPr>
+          </a:p>
+          <a:p>
+            <a:pPr defTabSz="457200">
+              <a:lnSpc>
+                <a:spcPct val="100000"/>
+              </a:lnSpc>
+              <a:spcAft>
+                <a:spcPts val="601"/>
+              </a:spcAft>
+            </a:pPr>
+            <a:r>
+              <a:rPr lang="es-ES" sz="1100" b="0" u="none" strike="noStrike">
+                <a:solidFill>
+                  <a:srgbClr val="28323C"/>
+                </a:solidFill>
+                <a:effectLst/>
+                <a:uFillTx/>
+                <a:latin typeface="Arial"/>
+              </a:rPr>
+              <a:t>• Estado de inicialización: El ecosistema arranca de forma autónoma con estos accesos estables y analíticas precargadas en la estantería.</a:t>
+            </a:r>
+            <a:endParaRPr lang="es-ES" sz="1100" b="0" u="none" strike="noStrike">
+              <a:solidFill>
+                <a:srgbClr val="000000"/>
+              </a:solidFill>
+              <a:effectLst/>
+              <a:uFillTx/>
+              <a:latin typeface="Arial"/>
+            </a:endParaRPr>
+          </a:p>
+        </p:txBody>
+      </p:sp>
+      <p:sp>
+        <p:nvSpPr>
+          <p:cNvPr id="66" name="Rounded Rectangle 5"/>
+          <p:cNvSpPr/>
+          <p:nvPr/>
+        </p:nvSpPr>
+        <p:spPr>
+          <a:xfrm>
+            <a:off x="6309360" y="1463040"/>
+            <a:ext cx="5120280" cy="4754520"/>
+          </a:xfrm>
+          <a:prstGeom prst="roundRect">
+            <a:avLst>
+              <a:gd name="adj" fmla="val 16667"/>
+            </a:avLst>
+          </a:prstGeom>
+          <a:solidFill>
+            <a:srgbClr val="FFFFFF"/>
+          </a:solidFill>
+          <a:ln w="12700">
+            <a:solidFill>
+              <a:srgbClr val="E6D7B4"/>
+            </a:solidFill>
+            <a:round/>
+          </a:ln>
+          <a:effectLst>
+            <a:outerShdw blurRad="39960" dir="5400000" dist="23040" rotWithShape="0">
+              <a:srgbClr val="000000">
+                <a:alpha val="35000"/>
+              </a:srgbClr>
+            </a:outerShdw>
+          </a:effectLst>
+        </p:spPr>
+        <p:style>
+          <a:lnRef idx="1">
+            <a:schemeClr val="accent1"/>
+          </a:lnRef>
+          <a:fillRef idx="3">
+            <a:schemeClr val="accent1"/>
+          </a:fillRef>
+          <a:effectRef idx="2">
+            <a:schemeClr val="accent1"/>
+          </a:effectRef>
+          <a:fontRef idx="minor"/>
+        </p:style>
+        <p:txBody>
+          <a:bodyPr lIns="90000" tIns="45000" rIns="90000" bIns="45000" anchor="ctr">
+            <a:noAutofit/>
+          </a:bodyPr>
+          <a:p>
+            <a:endParaRPr lang="es-ES" sz="1800" b="0" u="none" strike="noStrike">
+              <a:solidFill>
+                <a:schemeClr val="lt1"/>
+              </a:solidFill>
+              <a:effectLst/>
+              <a:uFillTx/>
+              <a:latin typeface="Calibri"/>
+            </a:endParaRPr>
+          </a:p>
+        </p:txBody>
+      </p:sp>
+      <p:sp>
+        <p:nvSpPr>
+          <p:cNvPr id="67" name="TextBox 6"/>
+          <p:cNvSpPr/>
+          <p:nvPr/>
+        </p:nvSpPr>
+        <p:spPr>
+          <a:xfrm>
+            <a:off x="6492240" y="1645920"/>
+            <a:ext cx="4754520" cy="2067840"/>
+          </a:xfrm>
+          <a:prstGeom prst="rect">
+            <a:avLst/>
+          </a:prstGeom>
+          <a:noFill/>
+          <a:ln w="0">
+            <a:noFill/>
+          </a:ln>
+        </p:spPr>
+        <p:style>
+          <a:lnRef idx="0"/>
+          <a:fillRef idx="0"/>
+          <a:effectRef idx="0"/>
+          <a:fontRef idx="minor"/>
+        </p:style>
+        <p:txBody>
+          <a:bodyPr lIns="90000" tIns="45000" rIns="90000" bIns="45000" anchor="t">
+            <a:spAutoFit/>
+          </a:bodyPr>
+          <a:p>
+            <a:pPr defTabSz="457200">
+              <a:lnSpc>
+                <a:spcPct val="100000"/>
+              </a:lnSpc>
+              <a:spcAft>
+                <a:spcPts val="799"/>
+              </a:spcAft>
+            </a:pPr>
+            <a:r>
+              <a:rPr lang="es-ES" sz="1400" b="0" u="none" strike="noStrike">
+                <a:solidFill>
+                  <a:srgbClr val="1E3A5F"/>
+                </a:solidFill>
+                <a:effectLst/>
+                <a:uFillTx/>
+                <a:latin typeface="Arial"/>
+              </a:rPr>
+              <a:t>Advertencia de Infraestructura</a:t>
             </a:r>
             <a:endParaRPr lang="es-ES" sz="1400" b="0" u="none" strike="noStrike">
               <a:solidFill>
@@ -7640,11 +8001,11 @@
                 <a:spcPct val="100000"/>
               </a:lnSpc>
               <a:spcAft>
-                <a:spcPts val="1199"/>
+                <a:spcPts val="601"/>
               </a:spcAft>
             </a:pPr>
             <a:r>
-              <a:rPr lang="en-US" sz="1400" b="0" u="none" strike="noStrike">
+              <a:rPr lang="es-ES" sz="1100" b="0" u="none" strike="noStrike">
                 <a:solidFill>
                   <a:srgbClr val="28323C"/>
                 </a:solidFill>
@@ -7652,9 +8013,9 @@
                 <a:uFillTx/>
                 <a:latin typeface="Arial"/>
               </a:rPr>
-              <a:t>• Correo electrónico de inscripción del alumno: danibarrasa74@gmail.com</a:t>
-            </a:r>
-            <a:endParaRPr lang="es-ES" sz="1400" b="0" u="none" strike="noStrike">
+              <a:t>• Regeneración de Streamlit: Al alojarse en la capa gratuita de Streamlit Cloud, el servidor entra en hibernación por inactividad y elimina los archivos locales generados.</a:t>
+            </a:r>
+            <a:endParaRPr lang="es-ES" sz="1100" b="0" u="none" strike="noStrike">
               <a:solidFill>
                 <a:srgbClr val="000000"/>
               </a:solidFill>
@@ -7669,11 +8030,11 @@
                 <a:spcPct val="100000"/>
               </a:lnSpc>
               <a:spcAft>
-                <a:spcPts val="1199"/>
+                <a:spcPts val="601"/>
               </a:spcAft>
             </a:pPr>
             <a:r>
-              <a:rPr lang="en-US" sz="1400" b="0" u="none" strike="noStrike">
+              <a:rPr lang="es-ES" sz="1100" b="0" u="none" strike="noStrike">
                 <a:solidFill>
                   <a:srgbClr val="28323C"/>
                 </a:solidFill>
@@ -7681,13 +8042,28 @@
                 <a:uFillTx/>
                 <a:latin typeface="Arial"/>
               </a:rPr>
-              <a:t>• Parámetros de autenticación para la cuenta de pruebas:</a:t>
-            </a:r>
-            <a:br>
-              <a:rPr sz="1400"/>
-            </a:br>
-            <a:r>
-              <a:rPr lang="en-US" sz="1400" b="0" u="none" strike="noStrike">
+              <a:t>• Mitigación mediante Data Seeding: Se ha programado un sistema de semillero de datos indestructible. Si la aplicación detecta un reinicio del contenedor, levanta en el acto este perfil de usuario junto con los doce libros de muestra para la auditoría.</a:t>
+            </a:r>
+            <a:endParaRPr lang="es-ES" sz="1100" b="0" u="none" strike="noStrike">
+              <a:solidFill>
+                <a:srgbClr val="000000"/>
+              </a:solidFill>
+              <a:effectLst/>
+              <a:uFillTx/>
+              <a:latin typeface="Arial"/>
+            </a:endParaRPr>
+          </a:p>
+          <a:p>
+            <a:pPr defTabSz="457200">
+              <a:lnSpc>
+                <a:spcPct val="100000"/>
+              </a:lnSpc>
+              <a:spcAft>
+                <a:spcPts val="601"/>
+              </a:spcAft>
+            </a:pPr>
+            <a:r>
+              <a:rPr lang="es-ES" sz="1100" b="0" u="none" strike="noStrike">
                 <a:solidFill>
                   <a:srgbClr val="28323C"/>
                 </a:solidFill>
@@ -7695,95 +8071,9 @@
                 <a:uFillTx/>
                 <a:latin typeface="Arial"/>
               </a:rPr>
-              <a:t>  - Identificador por nombre de usuario: profesor</a:t>
-            </a:r>
-            <a:br>
-              <a:rPr sz="1400"/>
-            </a:br>
-            <a:r>
-              <a:rPr lang="en-US" sz="1400" b="0" u="none" strike="noStrike">
-                <a:solidFill>
-                  <a:srgbClr val="28323C"/>
-                </a:solidFill>
-                <a:effectLst/>
-                <a:uFillTx/>
-                <a:latin typeface="Arial"/>
-              </a:rPr>
-              <a:t>  - Identificador por correo electrónico: profesor@tfm.com</a:t>
-            </a:r>
-            <a:br>
-              <a:rPr sz="1400"/>
-            </a:br>
-            <a:r>
-              <a:rPr lang="en-US" sz="1400" b="0" u="none" strike="noStrike">
-                <a:solidFill>
-                  <a:srgbClr val="28323C"/>
-                </a:solidFill>
-                <a:effectLst/>
-                <a:uFillTx/>
-                <a:latin typeface="Arial"/>
-              </a:rPr>
-              <a:t>  - Contraseña establecida de acceso: Profesor2026*</a:t>
-            </a:r>
-            <a:endParaRPr lang="es-ES" sz="1400" b="0" u="none" strike="noStrike">
-              <a:solidFill>
-                <a:srgbClr val="000000"/>
-              </a:solidFill>
-              <a:effectLst/>
-              <a:uFillTx/>
-              <a:latin typeface="Arial"/>
-            </a:endParaRPr>
-          </a:p>
-          <a:p>
-            <a:pPr defTabSz="457200">
-              <a:lnSpc>
-                <a:spcPct val="100000"/>
-              </a:lnSpc>
-              <a:spcAft>
-                <a:spcPts val="1199"/>
-              </a:spcAft>
-            </a:pPr>
-            <a:r>
-              <a:rPr lang="en-US" sz="1400" b="0" u="none" strike="noStrike">
-                <a:solidFill>
-                  <a:srgbClr val="28323C"/>
-                </a:solidFill>
-                <a:effectLst/>
-                <a:uFillTx/>
-                <a:latin typeface="Arial"/>
-              </a:rPr>
-              <a:t>• Advertencia de infraestructura (Regeneración de Streamlit): Al alojarse en la capa gratuita de Streamlit Cloud, el servidor entra en hibernación por inactividad y elimina los archivos locales generados. No obstante, se ha programado un sistema de semillero de datos (data seeding) indestructible: si la aplicación detecta un reinicio del contenedor, levanta en el acto este perfil de usuario junto con los doce libros de muestra para la auditoría.</a:t>
-            </a:r>
-            <a:endParaRPr lang="es-ES" sz="1400" b="0" u="none" strike="noStrike">
-              <a:solidFill>
-                <a:srgbClr val="000000"/>
-              </a:solidFill>
-              <a:effectLst/>
-              <a:uFillTx/>
-              <a:latin typeface="Arial"/>
-            </a:endParaRPr>
-          </a:p>
-          <a:p>
-            <a:pPr defTabSz="457200">
-              <a:lnSpc>
-                <a:spcPct val="100000"/>
-              </a:lnSpc>
-              <a:spcAft>
-                <a:spcPts val="1199"/>
-              </a:spcAft>
-            </a:pPr>
-            <a:r>
-              <a:rPr lang="en-US" sz="1400" b="0" u="none" strike="noStrike">
-                <a:solidFill>
-                  <a:srgbClr val="28323C"/>
-                </a:solidFill>
-                <a:effectLst/>
-                <a:uFillTx/>
-                <a:latin typeface="Arial"/>
-              </a:rPr>
-              <a:t>• Estado de inicialización: El ecosistema arranca de forma autónoma con estos accesos estables y analíticas precargadas en la estantería para permitir una evaluación directa e inmediata sin requerir registros manuales por parte del docente.</a:t>
-            </a:r>
-            <a:endParaRPr lang="es-ES" sz="1400" b="0" u="none" strike="noStrike">
+              <a:t>• Comodidad de evaluación: Permite una revisión directa e inmediata sin requerir registros manuales previos por parte del docente.</a:t>
+            </a:r>
+            <a:endParaRPr lang="es-ES" sz="1100" b="0" u="none" strike="noStrike">
               <a:solidFill>
                 <a:srgbClr val="000000"/>
               </a:solidFill>
@@ -7833,14 +8123,14 @@
       </p:grpSpPr>
       <p:sp>
         <p:nvSpPr>
-          <p:cNvPr id="65" name="TextBox 1"/>
+          <p:cNvPr id="68" name="TextBox 1"/>
           <p:cNvSpPr/>
           <p:nvPr/>
         </p:nvSpPr>
         <p:spPr>
           <a:xfrm>
             <a:off x="731520" y="365760"/>
-            <a:ext cx="10728360" cy="731160"/>
+            <a:ext cx="10728360" cy="517320"/>
           </a:xfrm>
           <a:prstGeom prst="rect">
             <a:avLst/>
@@ -7857,7 +8147,7 @@
           <a:fontRef idx="minor"/>
         </p:style>
         <p:txBody>
-          <a:bodyPr lIns="0" tIns="0" rIns="90000" bIns="45000" anchor="t">
+          <a:bodyPr lIns="90000" tIns="45000" rIns="90000" bIns="45000" anchor="t">
             <a:spAutoFit/>
           </a:bodyPr>
           <a:p>
@@ -7867,7 +8157,7 @@
               </a:lnSpc>
             </a:pPr>
             <a:r>
-              <a:rPr lang="en-US" sz="2800" b="0" u="none" strike="noStrike">
+              <a:rPr lang="es-ES" sz="2800" b="0" u="none" strike="noStrike">
                 <a:solidFill>
                   <a:srgbClr val="1E3A5F"/>
                 </a:solidFill>
@@ -7890,14 +8180,14 @@
       </p:sp>
       <p:sp>
         <p:nvSpPr>
-          <p:cNvPr id="66" name="Rectangle 2"/>
+          <p:cNvPr id="69" name="Rectangle 2"/>
           <p:cNvSpPr/>
           <p:nvPr/>
         </p:nvSpPr>
         <p:spPr>
           <a:xfrm>
-            <a:off x="731520" y="1188720"/>
-            <a:ext cx="10728360" cy="27000"/>
+            <a:off x="731520" y="1097280"/>
+            <a:ext cx="10728360" cy="18000"/>
           </a:xfrm>
           <a:prstGeom prst="rect">
             <a:avLst/>
@@ -7906,8 +8196,66 @@
             <a:srgbClr val="B8860B"/>
           </a:solidFill>
           <a:ln>
+            <a:noFill/>
+          </a:ln>
+          <a:effectLst>
+            <a:outerShdw blurRad="39960" dir="5400000" dist="23040" rotWithShape="0">
+              <a:srgbClr val="000000">
+                <a:alpha val="35000"/>
+              </a:srgbClr>
+            </a:outerShdw>
+          </a:effectLst>
+        </p:spPr>
+        <p:style>
+          <a:lnRef idx="1">
+            <a:schemeClr val="accent1"/>
+          </a:lnRef>
+          <a:fillRef idx="3">
+            <a:schemeClr val="accent1"/>
+          </a:fillRef>
+          <a:effectRef idx="2">
+            <a:schemeClr val="accent1"/>
+          </a:effectRef>
+          <a:fontRef idx="minor"/>
+        </p:style>
+        <p:txBody>
+          <a:bodyPr lIns="90000" tIns="-26640" rIns="90000" bIns="-26640" anchor="ctr">
+            <a:noAutofit/>
+          </a:bodyPr>
+          <a:p>
+            <a:endParaRPr lang="es-ES" sz="1800" b="0" u="none" strike="noStrike">
+              <a:solidFill>
+                <a:schemeClr val="lt1"/>
+              </a:solidFill>
+              <a:effectLst/>
+              <a:uFillTx/>
+              <a:latin typeface="Calibri"/>
+            </a:endParaRPr>
+          </a:p>
+        </p:txBody>
+      </p:sp>
+      <p:sp>
+        <p:nvSpPr>
+          <p:cNvPr id="70" name="Rounded Rectangle 3"/>
+          <p:cNvSpPr/>
+          <p:nvPr/>
+        </p:nvSpPr>
+        <p:spPr>
+          <a:xfrm>
+            <a:off x="731520" y="1463040"/>
+            <a:ext cx="10728360" cy="1371240"/>
+          </a:xfrm>
+          <a:prstGeom prst="roundRect">
+            <a:avLst>
+              <a:gd name="adj" fmla="val 16667"/>
+            </a:avLst>
+          </a:prstGeom>
+          <a:solidFill>
+            <a:srgbClr val="FFFFFF"/>
+          </a:solidFill>
+          <a:ln w="12700">
             <a:solidFill>
-              <a:srgbClr val="B8860B"/>
+              <a:srgbClr val="E6D7B4"/>
             </a:solidFill>
             <a:round/>
           </a:ln>
@@ -7932,11 +8280,11 @@
           <a:fontRef idx="minor"/>
         </p:style>
         <p:txBody>
-          <a:bodyPr lIns="90000" tIns="-17640" rIns="90000" bIns="-17640" anchor="ctr">
+          <a:bodyPr lIns="90000" tIns="45000" rIns="90000" bIns="45000" anchor="ctr">
             <a:noAutofit/>
           </a:bodyPr>
           <a:p>
-            <a:endParaRPr lang="en-US" sz="1800" b="0" u="none" strike="noStrike">
+            <a:endParaRPr lang="es-ES" sz="1800" b="0" u="none" strike="noStrike">
               <a:solidFill>
                 <a:schemeClr val="lt1"/>
               </a:solidFill>
@@ -7949,14 +8297,14 @@
       </p:sp>
       <p:sp>
         <p:nvSpPr>
-          <p:cNvPr id="67" name="TextBox 3"/>
+          <p:cNvPr id="71" name="TextBox 4"/>
           <p:cNvSpPr/>
           <p:nvPr/>
         </p:nvSpPr>
         <p:spPr>
           <a:xfrm>
-            <a:off x="731520" y="1554480"/>
-            <a:ext cx="10728360" cy="4754520"/>
+            <a:off x="914400" y="1645920"/>
+            <a:ext cx="10362600" cy="740880"/>
           </a:xfrm>
           <a:prstGeom prst="rect">
             <a:avLst/>
@@ -7973,7 +8321,7 @@
           <a:fontRef idx="minor"/>
         </p:style>
         <p:txBody>
-          <a:bodyPr lIns="0" tIns="0" rIns="0" bIns="0" anchor="t">
+          <a:bodyPr lIns="90000" tIns="45000" rIns="90000" bIns="45000" anchor="t">
             <a:spAutoFit/>
           </a:bodyPr>
           <a:p>
@@ -7982,11 +8330,40 @@
                 <a:spcPct val="100000"/>
               </a:lnSpc>
               <a:spcAft>
-                <a:spcPts val="1199"/>
+                <a:spcPts val="799"/>
               </a:spcAft>
             </a:pPr>
             <a:r>
-              <a:rPr lang="en-US" sz="1400" b="0" u="none" strike="noStrike">
+              <a:rPr lang="es-ES" sz="1400" b="0" u="none" strike="noStrike">
+                <a:solidFill>
+                  <a:srgbClr val="1E3A5F"/>
+                </a:solidFill>
+                <a:effectLst/>
+                <a:uFillTx/>
+                <a:latin typeface="Arial"/>
+              </a:rPr>
+              <a:t>Metodología Asistida por IA</a:t>
+            </a:r>
+            <a:endParaRPr lang="es-ES" sz="1400" b="0" u="none" strike="noStrike">
+              <a:solidFill>
+                <a:srgbClr val="000000"/>
+              </a:solidFill>
+              <a:effectLst/>
+              <a:uFillTx/>
+              <a:latin typeface="Arial"/>
+            </a:endParaRPr>
+          </a:p>
+          <a:p>
+            <a:pPr defTabSz="457200">
+              <a:lnSpc>
+                <a:spcPct val="100000"/>
+              </a:lnSpc>
+              <a:spcAft>
+                <a:spcPts val="601"/>
+              </a:spcAft>
+            </a:pPr>
+            <a:r>
+              <a:rPr lang="es-ES" sz="1100" b="0" u="none" strike="noStrike">
                 <a:solidFill>
                   <a:srgbClr val="28323C"/>
                 </a:solidFill>
@@ -7994,7 +8371,128 @@
                 <a:uFillTx/>
                 <a:latin typeface="Arial"/>
               </a:rPr>
-              <a:t>• Metodología aplicada: Desarrollo estructurado bajo el concepto de Producto Mínimo Viable (PMV).</a:t>
+              <a:t>Desarrollo basado en el concepto de Producto Mínimo Viable (PMV). Se explotó la Inteligencia Artificial mediante ingeniería de prompts avanzada para acelerar la refactorización de código defensivo, optimizar el aislamiento de transacciones SQL y diseñar las reglas algorítmicas de transición automática.</a:t>
+            </a:r>
+            <a:endParaRPr lang="es-ES" sz="1100" b="0" u="none" strike="noStrike">
+              <a:solidFill>
+                <a:srgbClr val="000000"/>
+              </a:solidFill>
+              <a:effectLst/>
+              <a:uFillTx/>
+              <a:latin typeface="Arial"/>
+            </a:endParaRPr>
+          </a:p>
+        </p:txBody>
+      </p:sp>
+      <p:sp>
+        <p:nvSpPr>
+          <p:cNvPr id="72" name="Rounded Rectangle 5"/>
+          <p:cNvSpPr/>
+          <p:nvPr/>
+        </p:nvSpPr>
+        <p:spPr>
+          <a:xfrm>
+            <a:off x="731520" y="3017520"/>
+            <a:ext cx="10728360" cy="1554120"/>
+          </a:xfrm>
+          <a:prstGeom prst="roundRect">
+            <a:avLst>
+              <a:gd name="adj" fmla="val 16667"/>
+            </a:avLst>
+          </a:prstGeom>
+          <a:solidFill>
+            <a:srgbClr val="FFFFFF"/>
+          </a:solidFill>
+          <a:ln w="12700">
+            <a:solidFill>
+              <a:srgbClr val="E6D7B4"/>
+            </a:solidFill>
+            <a:round/>
+          </a:ln>
+          <a:effectLst>
+            <a:outerShdw blurRad="39960" dir="5400000" dist="23040" rotWithShape="0">
+              <a:srgbClr val="000000">
+                <a:alpha val="35000"/>
+              </a:srgbClr>
+            </a:outerShdw>
+          </a:effectLst>
+        </p:spPr>
+        <p:style>
+          <a:lnRef idx="1">
+            <a:schemeClr val="accent1"/>
+          </a:lnRef>
+          <a:fillRef idx="3">
+            <a:schemeClr val="accent1"/>
+          </a:fillRef>
+          <a:effectRef idx="2">
+            <a:schemeClr val="accent1"/>
+          </a:effectRef>
+          <a:fontRef idx="minor"/>
+        </p:style>
+        <p:txBody>
+          <a:bodyPr lIns="90000" tIns="45000" rIns="90000" bIns="45000" anchor="ctr">
+            <a:noAutofit/>
+          </a:bodyPr>
+          <a:p>
+            <a:endParaRPr lang="es-ES" sz="1800" b="0" u="none" strike="noStrike">
+              <a:solidFill>
+                <a:schemeClr val="lt1"/>
+              </a:solidFill>
+              <a:effectLst/>
+              <a:uFillTx/>
+              <a:latin typeface="Calibri"/>
+            </a:endParaRPr>
+          </a:p>
+        </p:txBody>
+      </p:sp>
+      <p:sp>
+        <p:nvSpPr>
+          <p:cNvPr id="73" name="TextBox 6"/>
+          <p:cNvSpPr/>
+          <p:nvPr/>
+        </p:nvSpPr>
+        <p:spPr>
+          <a:xfrm>
+            <a:off x="914400" y="3200400"/>
+            <a:ext cx="10362600" cy="740880"/>
+          </a:xfrm>
+          <a:prstGeom prst="rect">
+            <a:avLst/>
+          </a:prstGeom>
+          <a:noFill/>
+          <a:ln w="0">
+            <a:noFill/>
+          </a:ln>
+        </p:spPr>
+        <p:style>
+          <a:lnRef idx="0"/>
+          <a:fillRef idx="0"/>
+          <a:effectRef idx="0"/>
+          <a:fontRef idx="minor"/>
+        </p:style>
+        <p:txBody>
+          <a:bodyPr lIns="90000" tIns="45000" rIns="90000" bIns="45000" anchor="t">
+            <a:spAutoFit/>
+          </a:bodyPr>
+          <a:p>
+            <a:pPr defTabSz="457200">
+              <a:lnSpc>
+                <a:spcPct val="100000"/>
+              </a:lnSpc>
+              <a:spcAft>
+                <a:spcPts val="799"/>
+              </a:spcAft>
+            </a:pPr>
+            <a:r>
+              <a:rPr lang="es-ES" sz="1400" b="0" u="none" strike="noStrike">
+                <a:solidFill>
+                  <a:srgbClr val="1E3A5F"/>
+                </a:solidFill>
+                <a:effectLst/>
+                <a:uFillTx/>
+                <a:latin typeface="Arial"/>
+              </a:rPr>
+              <a:t>Objetivos Estratégicos del Prototipo</a:t>
             </a:r>
             <a:endParaRPr lang="es-ES" sz="1400" b="0" u="none" strike="noStrike">
               <a:solidFill>
@@ -8011,11 +8509,11 @@
                 <a:spcPct val="100000"/>
               </a:lnSpc>
               <a:spcAft>
-                <a:spcPts val="1199"/>
+                <a:spcPts val="601"/>
               </a:spcAft>
             </a:pPr>
             <a:r>
-              <a:rPr lang="en-US" sz="1400" b="0" u="none" strike="noStrike">
+              <a:rPr lang="es-ES" sz="1100" b="0" u="none" strike="noStrike">
                 <a:solidFill>
                   <a:srgbClr val="28323C"/>
                 </a:solidFill>
@@ -8023,7 +8521,128 @@
                 <a:uFillTx/>
                 <a:latin typeface="Arial"/>
               </a:rPr>
-              <a:t>• Objetivos estratégicos del prototipo: Validar las dinámicas lógicas de una plataforma de lectura compartida (control de accesos, altas comunes por ISBN, transiciones reactivas de progreso y sumatorios analíticos de rendimiento lector).</a:t>
+              <a:t>Validar las dinámicas lógicas de una plataforma de lectura compartida (control de accesos, altas comunes por ISBN, transiciones reactivas de progreso y sumatorios analíticos de rendimiento lector).</a:t>
+            </a:r>
+            <a:endParaRPr lang="es-ES" sz="1100" b="0" u="none" strike="noStrike">
+              <a:solidFill>
+                <a:srgbClr val="000000"/>
+              </a:solidFill>
+              <a:effectLst/>
+              <a:uFillTx/>
+              <a:latin typeface="Arial"/>
+            </a:endParaRPr>
+          </a:p>
+        </p:txBody>
+      </p:sp>
+      <p:sp>
+        <p:nvSpPr>
+          <p:cNvPr id="74" name="Rounded Rectangle 7"/>
+          <p:cNvSpPr/>
+          <p:nvPr/>
+        </p:nvSpPr>
+        <p:spPr>
+          <a:xfrm>
+            <a:off x="731520" y="4754880"/>
+            <a:ext cx="10728360" cy="1462680"/>
+          </a:xfrm>
+          <a:prstGeom prst="roundRect">
+            <a:avLst>
+              <a:gd name="adj" fmla="val 16667"/>
+            </a:avLst>
+          </a:prstGeom>
+          <a:solidFill>
+            <a:srgbClr val="FFFFFF"/>
+          </a:solidFill>
+          <a:ln w="12700">
+            <a:solidFill>
+              <a:srgbClr val="E6D7B4"/>
+            </a:solidFill>
+            <a:round/>
+          </a:ln>
+          <a:effectLst>
+            <a:outerShdw blurRad="39960" dir="5400000" dist="23040" rotWithShape="0">
+              <a:srgbClr val="000000">
+                <a:alpha val="35000"/>
+              </a:srgbClr>
+            </a:outerShdw>
+          </a:effectLst>
+        </p:spPr>
+        <p:style>
+          <a:lnRef idx="1">
+            <a:schemeClr val="accent1"/>
+          </a:lnRef>
+          <a:fillRef idx="3">
+            <a:schemeClr val="accent1"/>
+          </a:fillRef>
+          <a:effectRef idx="2">
+            <a:schemeClr val="accent1"/>
+          </a:effectRef>
+          <a:fontRef idx="minor"/>
+        </p:style>
+        <p:txBody>
+          <a:bodyPr lIns="90000" tIns="45000" rIns="90000" bIns="45000" anchor="ctr">
+            <a:noAutofit/>
+          </a:bodyPr>
+          <a:p>
+            <a:endParaRPr lang="es-ES" sz="1800" b="0" u="none" strike="noStrike">
+              <a:solidFill>
+                <a:schemeClr val="lt1"/>
+              </a:solidFill>
+              <a:effectLst/>
+              <a:uFillTx/>
+              <a:latin typeface="Calibri"/>
+            </a:endParaRPr>
+          </a:p>
+        </p:txBody>
+      </p:sp>
+      <p:sp>
+        <p:nvSpPr>
+          <p:cNvPr id="75" name="TextBox 8"/>
+          <p:cNvSpPr/>
+          <p:nvPr/>
+        </p:nvSpPr>
+        <p:spPr>
+          <a:xfrm>
+            <a:off x="914400" y="4937760"/>
+            <a:ext cx="10362600" cy="740880"/>
+          </a:xfrm>
+          <a:prstGeom prst="rect">
+            <a:avLst/>
+          </a:prstGeom>
+          <a:noFill/>
+          <a:ln w="0">
+            <a:noFill/>
+          </a:ln>
+        </p:spPr>
+        <p:style>
+          <a:lnRef idx="0"/>
+          <a:fillRef idx="0"/>
+          <a:effectRef idx="0"/>
+          <a:fontRef idx="minor"/>
+        </p:style>
+        <p:txBody>
+          <a:bodyPr lIns="90000" tIns="45000" rIns="90000" bIns="45000" anchor="t">
+            <a:spAutoFit/>
+          </a:bodyPr>
+          <a:p>
+            <a:pPr defTabSz="457200">
+              <a:lnSpc>
+                <a:spcPct val="100000"/>
+              </a:lnSpc>
+              <a:spcAft>
+                <a:spcPts val="799"/>
+              </a:spcAft>
+            </a:pPr>
+            <a:r>
+              <a:rPr lang="es-ES" sz="1400" b="0" u="none" strike="noStrike">
+                <a:solidFill>
+                  <a:srgbClr val="1E3A5F"/>
+                </a:solidFill>
+                <a:effectLst/>
+                <a:uFillTx/>
+                <a:latin typeface="Arial"/>
+              </a:rPr>
+              <a:t>Criterio de Desarrollo de Software</a:t>
             </a:r>
             <a:endParaRPr lang="es-ES" sz="1400" b="0" u="none" strike="noStrike">
               <a:solidFill>
@@ -8040,11 +8659,11 @@
                 <a:spcPct val="100000"/>
               </a:lnSpc>
               <a:spcAft>
-                <a:spcPts val="1199"/>
+                <a:spcPts val="601"/>
               </a:spcAft>
             </a:pPr>
             <a:r>
-              <a:rPr lang="en-US" sz="1400" b="0" u="none" strike="noStrike">
+              <a:rPr lang="es-ES" sz="1100" b="0" u="none" strike="noStrike">
                 <a:solidFill>
                   <a:srgbClr val="28323C"/>
                 </a:solidFill>
@@ -8052,9 +8671,9 @@
                 <a:uFillTx/>
                 <a:latin typeface="Arial"/>
               </a:rPr>
-              <a:t>• Criterio de desarrollo: Concentración absoluta de esfuerzos en la robustez algorítmica y los mecanismos defensivos de seguridad, postergando infraestructuras de almacenamiento comercial para fases posteriores de escalabilidad.</a:t>
-            </a:r>
-            <a:endParaRPr lang="es-ES" sz="1400" b="0" u="none" strike="noStrike">
+              <a:t>Concentración absoluta de esfuerzos en la robustez algorítmica y los mecanismos defensivos de seguridad perimetral, postergando infraestructuras de almacenamiento comercial o escalabilidad masiva para fases de negocio posteriores.</a:t>
+            </a:r>
+            <a:endParaRPr lang="es-ES" sz="1100" b="0" u="none" strike="noStrike">
               <a:solidFill>
                 <a:srgbClr val="000000"/>
               </a:solidFill>
@@ -8104,14 +8723,14 @@
       </p:grpSpPr>
       <p:sp>
         <p:nvSpPr>
-          <p:cNvPr id="68" name="TextBox 1"/>
+          <p:cNvPr id="76" name="TextBox 1"/>
           <p:cNvSpPr/>
           <p:nvPr/>
         </p:nvSpPr>
         <p:spPr>
           <a:xfrm>
-            <a:off x="731520" y="365760"/>
-            <a:ext cx="10728360" cy="731160"/>
+            <a:off x="731520" y="153720"/>
+            <a:ext cx="10728360" cy="943560"/>
           </a:xfrm>
           <a:prstGeom prst="rect">
             <a:avLst/>
@@ -8128,7 +8747,7 @@
           <a:fontRef idx="minor"/>
         </p:style>
         <p:txBody>
-          <a:bodyPr lIns="0" tIns="0" rIns="90000" bIns="45000" anchor="t">
+          <a:bodyPr lIns="90000" tIns="45000" rIns="90000" bIns="45000" anchor="t">
             <a:spAutoFit/>
           </a:bodyPr>
           <a:p>
@@ -8138,7 +8757,7 @@
               </a:lnSpc>
             </a:pPr>
             <a:r>
-              <a:rPr lang="en-US" sz="2800" b="0" u="none" strike="noStrike">
+              <a:rPr lang="es-ES" sz="2800" b="0" u="none" strike="noStrike">
                 <a:solidFill>
                   <a:srgbClr val="1E3A5F"/>
                 </a:solidFill>
@@ -8161,14 +8780,14 @@
       </p:sp>
       <p:sp>
         <p:nvSpPr>
-          <p:cNvPr id="69" name="Rectangle 2"/>
+          <p:cNvPr id="77" name="Rectangle 2"/>
           <p:cNvSpPr/>
           <p:nvPr/>
         </p:nvSpPr>
         <p:spPr>
           <a:xfrm>
-            <a:off x="731520" y="1188720"/>
-            <a:ext cx="10728360" cy="27000"/>
+            <a:off x="731520" y="1097280"/>
+            <a:ext cx="10728360" cy="18000"/>
           </a:xfrm>
           <a:prstGeom prst="rect">
             <a:avLst/>
@@ -8177,8 +8796,66 @@
             <a:srgbClr val="B8860B"/>
           </a:solidFill>
           <a:ln>
+            <a:noFill/>
+          </a:ln>
+          <a:effectLst>
+            <a:outerShdw blurRad="39960" dir="5400000" dist="23040" rotWithShape="0">
+              <a:srgbClr val="000000">
+                <a:alpha val="35000"/>
+              </a:srgbClr>
+            </a:outerShdw>
+          </a:effectLst>
+        </p:spPr>
+        <p:style>
+          <a:lnRef idx="1">
+            <a:schemeClr val="accent1"/>
+          </a:lnRef>
+          <a:fillRef idx="3">
+            <a:schemeClr val="accent1"/>
+          </a:fillRef>
+          <a:effectRef idx="2">
+            <a:schemeClr val="accent1"/>
+          </a:effectRef>
+          <a:fontRef idx="minor"/>
+        </p:style>
+        <p:txBody>
+          <a:bodyPr lIns="90000" tIns="-26640" rIns="90000" bIns="-26640" anchor="ctr">
+            <a:noAutofit/>
+          </a:bodyPr>
+          <a:p>
+            <a:endParaRPr lang="es-ES" sz="1800" b="0" u="none" strike="noStrike">
+              <a:solidFill>
+                <a:schemeClr val="lt1"/>
+              </a:solidFill>
+              <a:effectLst/>
+              <a:uFillTx/>
+              <a:latin typeface="Calibri"/>
+            </a:endParaRPr>
+          </a:p>
+        </p:txBody>
+      </p:sp>
+      <p:sp>
+        <p:nvSpPr>
+          <p:cNvPr id="78" name="Rounded Rectangle 3"/>
+          <p:cNvSpPr/>
+          <p:nvPr/>
+        </p:nvSpPr>
+        <p:spPr>
+          <a:xfrm>
+            <a:off x="731520" y="1463040"/>
+            <a:ext cx="5120280" cy="2194200"/>
+          </a:xfrm>
+          <a:prstGeom prst="roundRect">
+            <a:avLst>
+              <a:gd name="adj" fmla="val 16667"/>
+            </a:avLst>
+          </a:prstGeom>
+          <a:solidFill>
+            <a:srgbClr val="FFFFFF"/>
+          </a:solidFill>
+          <a:ln w="12700">
             <a:solidFill>
-              <a:srgbClr val="B8860B"/>
+              <a:srgbClr val="E6D7B4"/>
             </a:solidFill>
             <a:round/>
           </a:ln>
@@ -8203,11 +8880,11 @@
           <a:fontRef idx="minor"/>
         </p:style>
         <p:txBody>
-          <a:bodyPr lIns="90000" tIns="-17640" rIns="90000" bIns="-17640" anchor="ctr">
+          <a:bodyPr lIns="90000" tIns="45000" rIns="90000" bIns="45000" anchor="ctr">
             <a:noAutofit/>
           </a:bodyPr>
           <a:p>
-            <a:endParaRPr lang="en-US" sz="1800" b="0" u="none" strike="noStrike">
+            <a:endParaRPr lang="es-ES" sz="1800" b="0" u="none" strike="noStrike">
               <a:solidFill>
                 <a:schemeClr val="lt1"/>
               </a:solidFill>
@@ -8220,14 +8897,14 @@
       </p:sp>
       <p:sp>
         <p:nvSpPr>
-          <p:cNvPr id="70" name="TextBox 3"/>
+          <p:cNvPr id="79" name="TextBox 4"/>
           <p:cNvSpPr/>
           <p:nvPr/>
         </p:nvSpPr>
         <p:spPr>
           <a:xfrm>
-            <a:off x="731520" y="1554480"/>
-            <a:ext cx="10728360" cy="4754520"/>
+            <a:off x="914400" y="1645920"/>
+            <a:ext cx="4754520" cy="908640"/>
           </a:xfrm>
           <a:prstGeom prst="rect">
             <a:avLst/>
@@ -8244,7 +8921,7 @@
           <a:fontRef idx="minor"/>
         </p:style>
         <p:txBody>
-          <a:bodyPr lIns="0" tIns="0" rIns="0" bIns="0" anchor="t">
+          <a:bodyPr lIns="90000" tIns="45000" rIns="90000" bIns="45000" anchor="t">
             <a:spAutoFit/>
           </a:bodyPr>
           <a:p>
@@ -8253,11 +8930,40 @@
                 <a:spcPct val="100000"/>
               </a:lnSpc>
               <a:spcAft>
-                <a:spcPts val="1199"/>
+                <a:spcPts val="799"/>
               </a:spcAft>
             </a:pPr>
             <a:r>
-              <a:rPr lang="en-US" sz="1400" b="0" u="none" strike="noStrike">
+              <a:rPr lang="es-ES" sz="1400" b="0" u="none" strike="noStrike">
+                <a:solidFill>
+                  <a:srgbClr val="1E3A5F"/>
+                </a:solidFill>
+                <a:effectLst/>
+                <a:uFillTx/>
+                <a:latin typeface="Arial"/>
+              </a:rPr>
+              <a:t>Capa de Presentación (app.py)</a:t>
+            </a:r>
+            <a:endParaRPr lang="es-ES" sz="1400" b="0" u="none" strike="noStrike">
+              <a:solidFill>
+                <a:srgbClr val="000000"/>
+              </a:solidFill>
+              <a:effectLst/>
+              <a:uFillTx/>
+              <a:latin typeface="Arial"/>
+            </a:endParaRPr>
+          </a:p>
+          <a:p>
+            <a:pPr defTabSz="457200">
+              <a:lnSpc>
+                <a:spcPct val="100000"/>
+              </a:lnSpc>
+              <a:spcAft>
+                <a:spcPts val="601"/>
+              </a:spcAft>
+            </a:pPr>
+            <a:r>
+              <a:rPr lang="es-ES" sz="1100" b="0" u="none" strike="noStrike">
                 <a:solidFill>
                   <a:srgbClr val="28323C"/>
                 </a:solidFill>
@@ -8265,7 +8971,128 @@
                 <a:uFillTx/>
                 <a:latin typeface="Arial"/>
               </a:rPr>
-              <a:t>• Filosofía de diseño: Código modularizado en componentes independientes de Python para facilitar el mantenimiento y cumplir con los estándares de calidad del máster.</a:t>
+              <a:t>Control de la interfaz gráfica, diseño reactivo mediante inyección controlada de estilos avanzados CSS y gestión centralizada del estado de la sesión de navegación web.</a:t>
+            </a:r>
+            <a:endParaRPr lang="es-ES" sz="1100" b="0" u="none" strike="noStrike">
+              <a:solidFill>
+                <a:srgbClr val="000000"/>
+              </a:solidFill>
+              <a:effectLst/>
+              <a:uFillTx/>
+              <a:latin typeface="Arial"/>
+            </a:endParaRPr>
+          </a:p>
+        </p:txBody>
+      </p:sp>
+      <p:sp>
+        <p:nvSpPr>
+          <p:cNvPr id="80" name="Rounded Rectangle 5"/>
+          <p:cNvSpPr/>
+          <p:nvPr/>
+        </p:nvSpPr>
+        <p:spPr>
+          <a:xfrm>
+            <a:off x="6309360" y="1463040"/>
+            <a:ext cx="5120280" cy="2194200"/>
+          </a:xfrm>
+          <a:prstGeom prst="roundRect">
+            <a:avLst>
+              <a:gd name="adj" fmla="val 16667"/>
+            </a:avLst>
+          </a:prstGeom>
+          <a:solidFill>
+            <a:srgbClr val="FFFFFF"/>
+          </a:solidFill>
+          <a:ln w="12700">
+            <a:solidFill>
+              <a:srgbClr val="E6D7B4"/>
+            </a:solidFill>
+            <a:round/>
+          </a:ln>
+          <a:effectLst>
+            <a:outerShdw blurRad="39960" dir="5400000" dist="23040" rotWithShape="0">
+              <a:srgbClr val="000000">
+                <a:alpha val="35000"/>
+              </a:srgbClr>
+            </a:outerShdw>
+          </a:effectLst>
+        </p:spPr>
+        <p:style>
+          <a:lnRef idx="1">
+            <a:schemeClr val="accent1"/>
+          </a:lnRef>
+          <a:fillRef idx="3">
+            <a:schemeClr val="accent1"/>
+          </a:fillRef>
+          <a:effectRef idx="2">
+            <a:schemeClr val="accent1"/>
+          </a:effectRef>
+          <a:fontRef idx="minor"/>
+        </p:style>
+        <p:txBody>
+          <a:bodyPr lIns="90000" tIns="45000" rIns="90000" bIns="45000" anchor="ctr">
+            <a:noAutofit/>
+          </a:bodyPr>
+          <a:p>
+            <a:endParaRPr lang="es-ES" sz="1800" b="0" u="none" strike="noStrike">
+              <a:solidFill>
+                <a:schemeClr val="lt1"/>
+              </a:solidFill>
+              <a:effectLst/>
+              <a:uFillTx/>
+              <a:latin typeface="Calibri"/>
+            </a:endParaRPr>
+          </a:p>
+        </p:txBody>
+      </p:sp>
+      <p:sp>
+        <p:nvSpPr>
+          <p:cNvPr id="81" name="TextBox 6"/>
+          <p:cNvSpPr/>
+          <p:nvPr/>
+        </p:nvSpPr>
+        <p:spPr>
+          <a:xfrm>
+            <a:off x="6492240" y="1645920"/>
+            <a:ext cx="4754520" cy="908640"/>
+          </a:xfrm>
+          <a:prstGeom prst="rect">
+            <a:avLst/>
+          </a:prstGeom>
+          <a:noFill/>
+          <a:ln w="0">
+            <a:noFill/>
+          </a:ln>
+        </p:spPr>
+        <p:style>
+          <a:lnRef idx="0"/>
+          <a:fillRef idx="0"/>
+          <a:effectRef idx="0"/>
+          <a:fontRef idx="minor"/>
+        </p:style>
+        <p:txBody>
+          <a:bodyPr lIns="90000" tIns="45000" rIns="90000" bIns="45000" anchor="t">
+            <a:spAutoFit/>
+          </a:bodyPr>
+          <a:p>
+            <a:pPr defTabSz="457200">
+              <a:lnSpc>
+                <a:spcPct val="100000"/>
+              </a:lnSpc>
+              <a:spcAft>
+                <a:spcPts val="799"/>
+              </a:spcAft>
+            </a:pPr>
+            <a:r>
+              <a:rPr lang="es-ES" sz="1400" b="0" u="none" strike="noStrike">
+                <a:solidFill>
+                  <a:srgbClr val="1E3A5F"/>
+                </a:solidFill>
+                <a:effectLst/>
+                <a:uFillTx/>
+                <a:latin typeface="Arial"/>
+              </a:rPr>
+              <a:t>Módulo de Identidades (auth_manager.py)</a:t>
             </a:r>
             <a:endParaRPr lang="es-ES" sz="1400" b="0" u="none" strike="noStrike">
               <a:solidFill>
@@ -8282,11 +9109,11 @@
                 <a:spcPct val="100000"/>
               </a:lnSpc>
               <a:spcAft>
-                <a:spcPts val="1199"/>
+                <a:spcPts val="601"/>
               </a:spcAft>
             </a:pPr>
             <a:r>
-              <a:rPr lang="en-US" sz="1400" b="0" u="none" strike="noStrike">
+              <a:rPr lang="es-ES" sz="1100" b="0" u="none" strike="noStrike">
                 <a:solidFill>
                   <a:srgbClr val="28323C"/>
                 </a:solidFill>
@@ -8294,7 +9121,128 @@
                 <a:uFillTx/>
                 <a:latin typeface="Arial"/>
               </a:rPr>
-              <a:t>• Distribución del ecosistema de software:</a:t>
+              <a:t>Gestión e inicio de sesión de usuarios, validaciones tipográficas rigurosas alineadas con las recomendaciones OWASP y procesamiento seguro de hashes.</a:t>
+            </a:r>
+            <a:endParaRPr lang="es-ES" sz="1100" b="0" u="none" strike="noStrike">
+              <a:solidFill>
+                <a:srgbClr val="000000"/>
+              </a:solidFill>
+              <a:effectLst/>
+              <a:uFillTx/>
+              <a:latin typeface="Arial"/>
+            </a:endParaRPr>
+          </a:p>
+        </p:txBody>
+      </p:sp>
+      <p:sp>
+        <p:nvSpPr>
+          <p:cNvPr id="82" name="Rounded Rectangle 7"/>
+          <p:cNvSpPr/>
+          <p:nvPr/>
+        </p:nvSpPr>
+        <p:spPr>
+          <a:xfrm>
+            <a:off x="731520" y="3931920"/>
+            <a:ext cx="5120280" cy="2285640"/>
+          </a:xfrm>
+          <a:prstGeom prst="roundRect">
+            <a:avLst>
+              <a:gd name="adj" fmla="val 16667"/>
+            </a:avLst>
+          </a:prstGeom>
+          <a:solidFill>
+            <a:srgbClr val="FFFFFF"/>
+          </a:solidFill>
+          <a:ln w="12700">
+            <a:solidFill>
+              <a:srgbClr val="E6D7B4"/>
+            </a:solidFill>
+            <a:round/>
+          </a:ln>
+          <a:effectLst>
+            <a:outerShdw blurRad="39960" dir="5400000" dist="23040" rotWithShape="0">
+              <a:srgbClr val="000000">
+                <a:alpha val="35000"/>
+              </a:srgbClr>
+            </a:outerShdw>
+          </a:effectLst>
+        </p:spPr>
+        <p:style>
+          <a:lnRef idx="1">
+            <a:schemeClr val="accent1"/>
+          </a:lnRef>
+          <a:fillRef idx="3">
+            <a:schemeClr val="accent1"/>
+          </a:fillRef>
+          <a:effectRef idx="2">
+            <a:schemeClr val="accent1"/>
+          </a:effectRef>
+          <a:fontRef idx="minor"/>
+        </p:style>
+        <p:txBody>
+          <a:bodyPr lIns="90000" tIns="45000" rIns="90000" bIns="45000" anchor="ctr">
+            <a:noAutofit/>
+          </a:bodyPr>
+          <a:p>
+            <a:endParaRPr lang="es-ES" sz="1800" b="0" u="none" strike="noStrike">
+              <a:solidFill>
+                <a:schemeClr val="lt1"/>
+              </a:solidFill>
+              <a:effectLst/>
+              <a:uFillTx/>
+              <a:latin typeface="Calibri"/>
+            </a:endParaRPr>
+          </a:p>
+        </p:txBody>
+      </p:sp>
+      <p:sp>
+        <p:nvSpPr>
+          <p:cNvPr id="83" name="TextBox 8"/>
+          <p:cNvSpPr/>
+          <p:nvPr/>
+        </p:nvSpPr>
+        <p:spPr>
+          <a:xfrm>
+            <a:off x="914400" y="4114800"/>
+            <a:ext cx="4754520" cy="908640"/>
+          </a:xfrm>
+          <a:prstGeom prst="rect">
+            <a:avLst/>
+          </a:prstGeom>
+          <a:noFill/>
+          <a:ln w="0">
+            <a:noFill/>
+          </a:ln>
+        </p:spPr>
+        <p:style>
+          <a:lnRef idx="0"/>
+          <a:fillRef idx="0"/>
+          <a:effectRef idx="0"/>
+          <a:fontRef idx="minor"/>
+        </p:style>
+        <p:txBody>
+          <a:bodyPr lIns="90000" tIns="45000" rIns="90000" bIns="45000" anchor="t">
+            <a:spAutoFit/>
+          </a:bodyPr>
+          <a:p>
+            <a:pPr defTabSz="457200">
+              <a:lnSpc>
+                <a:spcPct val="100000"/>
+              </a:lnSpc>
+              <a:spcAft>
+                <a:spcPts val="799"/>
+              </a:spcAft>
+            </a:pPr>
+            <a:r>
+              <a:rPr lang="es-ES" sz="1400" b="0" u="none" strike="noStrike">
+                <a:solidFill>
+                  <a:srgbClr val="1E3A5F"/>
+                </a:solidFill>
+                <a:effectLst/>
+                <a:uFillTx/>
+                <a:latin typeface="Arial"/>
+              </a:rPr>
+              <a:t>Gestor de Persistencia (database_manager.py)</a:t>
             </a:r>
             <a:endParaRPr lang="es-ES" sz="1400" b="0" u="none" strike="noStrike">
               <a:solidFill>
@@ -8311,11 +9259,11 @@
                 <a:spcPct val="100000"/>
               </a:lnSpc>
               <a:spcAft>
-                <a:spcPts val="1199"/>
+                <a:spcPts val="601"/>
               </a:spcAft>
             </a:pPr>
             <a:r>
-              <a:rPr lang="en-US" sz="1400" b="0" u="none" strike="noStrike">
+              <a:rPr lang="es-ES" sz="1100" b="0" u="none" strike="noStrike">
                 <a:solidFill>
                   <a:srgbClr val="28323C"/>
                 </a:solidFill>
@@ -8323,7 +9271,128 @@
                 <a:uFillTx/>
                 <a:latin typeface="Arial"/>
               </a:rPr>
-              <a:t>  - Capa de presentación (app.py): Control de interfaces reactivas, inyección de estilos avanzados y gestión del estado de sesión.</a:t>
+              <a:t>Aislamiento total de transacciones e hilos de conexión SQL con la base de datos relacional. Centraliza las consultas de estadísticas, desgloses y el mecanismo de semillero de datos.</a:t>
+            </a:r>
+            <a:endParaRPr lang="es-ES" sz="1100" b="0" u="none" strike="noStrike">
+              <a:solidFill>
+                <a:srgbClr val="000000"/>
+              </a:solidFill>
+              <a:effectLst/>
+              <a:uFillTx/>
+              <a:latin typeface="Arial"/>
+            </a:endParaRPr>
+          </a:p>
+        </p:txBody>
+      </p:sp>
+      <p:sp>
+        <p:nvSpPr>
+          <p:cNvPr id="84" name="Rounded Rectangle 9"/>
+          <p:cNvSpPr/>
+          <p:nvPr/>
+        </p:nvSpPr>
+        <p:spPr>
+          <a:xfrm>
+            <a:off x="6309360" y="3931920"/>
+            <a:ext cx="5120280" cy="2285640"/>
+          </a:xfrm>
+          <a:prstGeom prst="roundRect">
+            <a:avLst>
+              <a:gd name="adj" fmla="val 16667"/>
+            </a:avLst>
+          </a:prstGeom>
+          <a:solidFill>
+            <a:srgbClr val="FFFFFF"/>
+          </a:solidFill>
+          <a:ln w="12700">
+            <a:solidFill>
+              <a:srgbClr val="E6D7B4"/>
+            </a:solidFill>
+            <a:round/>
+          </a:ln>
+          <a:effectLst>
+            <a:outerShdw blurRad="39960" dir="5400000" dist="23040" rotWithShape="0">
+              <a:srgbClr val="000000">
+                <a:alpha val="35000"/>
+              </a:srgbClr>
+            </a:outerShdw>
+          </a:effectLst>
+        </p:spPr>
+        <p:style>
+          <a:lnRef idx="1">
+            <a:schemeClr val="accent1"/>
+          </a:lnRef>
+          <a:fillRef idx="3">
+            <a:schemeClr val="accent1"/>
+          </a:fillRef>
+          <a:effectRef idx="2">
+            <a:schemeClr val="accent1"/>
+          </a:effectRef>
+          <a:fontRef idx="minor"/>
+        </p:style>
+        <p:txBody>
+          <a:bodyPr lIns="90000" tIns="45000" rIns="90000" bIns="45000" anchor="ctr">
+            <a:noAutofit/>
+          </a:bodyPr>
+          <a:p>
+            <a:endParaRPr lang="es-ES" sz="1800" b="0" u="none" strike="noStrike">
+              <a:solidFill>
+                <a:schemeClr val="lt1"/>
+              </a:solidFill>
+              <a:effectLst/>
+              <a:uFillTx/>
+              <a:latin typeface="Calibri"/>
+            </a:endParaRPr>
+          </a:p>
+        </p:txBody>
+      </p:sp>
+      <p:sp>
+        <p:nvSpPr>
+          <p:cNvPr id="85" name="TextBox 10"/>
+          <p:cNvSpPr/>
+          <p:nvPr/>
+        </p:nvSpPr>
+        <p:spPr>
+          <a:xfrm>
+            <a:off x="6492240" y="4114800"/>
+            <a:ext cx="4754520" cy="908640"/>
+          </a:xfrm>
+          <a:prstGeom prst="rect">
+            <a:avLst/>
+          </a:prstGeom>
+          <a:noFill/>
+          <a:ln w="0">
+            <a:noFill/>
+          </a:ln>
+        </p:spPr>
+        <p:style>
+          <a:lnRef idx="0"/>
+          <a:fillRef idx="0"/>
+          <a:effectRef idx="0"/>
+          <a:fontRef idx="minor"/>
+        </p:style>
+        <p:txBody>
+          <a:bodyPr lIns="90000" tIns="45000" rIns="90000" bIns="45000" anchor="t">
+            <a:spAutoFit/>
+          </a:bodyPr>
+          <a:p>
+            <a:pPr defTabSz="457200">
+              <a:lnSpc>
+                <a:spcPct val="100000"/>
+              </a:lnSpc>
+              <a:spcAft>
+                <a:spcPts val="799"/>
+              </a:spcAft>
+            </a:pPr>
+            <a:r>
+              <a:rPr lang="es-ES" sz="1400" b="0" u="none" strike="noStrike">
+                <a:solidFill>
+                  <a:srgbClr val="1E3A5F"/>
+                </a:solidFill>
+                <a:effectLst/>
+                <a:uFillTx/>
+                <a:latin typeface="Arial"/>
+              </a:rPr>
+              <a:t>Componente Transversal (utils.py)</a:t>
             </a:r>
             <a:endParaRPr lang="es-ES" sz="1400" b="0" u="none" strike="noStrike">
               <a:solidFill>
@@ -8340,11 +9409,11 @@
                 <a:spcPct val="100000"/>
               </a:lnSpc>
               <a:spcAft>
-                <a:spcPts val="1199"/>
+                <a:spcPts val="601"/>
               </a:spcAft>
             </a:pPr>
             <a:r>
-              <a:rPr lang="en-US" sz="1400" b="0" u="none" strike="noStrike">
+              <a:rPr lang="es-ES" sz="1100" b="0" u="none" strike="noStrike">
                 <a:solidFill>
                   <a:srgbClr val="28323C"/>
                 </a:solidFill>
@@ -8352,67 +9421,9 @@
                 <a:uFillTx/>
                 <a:latin typeface="Arial"/>
               </a:rPr>
-              <a:t>  - Módulo de identidades (auth_manager.py): Validaciones de tipografía OWASP y procesamiento de hashes de usuario.</a:t>
-            </a:r>
-            <a:endParaRPr lang="es-ES" sz="1400" b="0" u="none" strike="noStrike">
-              <a:solidFill>
-                <a:srgbClr val="000000"/>
-              </a:solidFill>
-              <a:effectLst/>
-              <a:uFillTx/>
-              <a:latin typeface="Arial"/>
-            </a:endParaRPr>
-          </a:p>
-          <a:p>
-            <a:pPr defTabSz="457200">
-              <a:lnSpc>
-                <a:spcPct val="100000"/>
-              </a:lnSpc>
-              <a:spcAft>
-                <a:spcPts val="1199"/>
-              </a:spcAft>
-            </a:pPr>
-            <a:r>
-              <a:rPr lang="en-US" sz="1400" b="0" u="none" strike="noStrike">
-                <a:solidFill>
-                  <a:srgbClr val="28323C"/>
-                </a:solidFill>
-                <a:effectLst/>
-                <a:uFillTx/>
-                <a:latin typeface="Arial"/>
-              </a:rPr>
-              <a:t>  - Gestor de persistencia (database_manager.py): Aislamiento total de transacciones e hilos de conexión SQLite.</a:t>
-            </a:r>
-            <a:endParaRPr lang="es-ES" sz="1400" b="0" u="none" strike="noStrike">
-              <a:solidFill>
-                <a:srgbClr val="000000"/>
-              </a:solidFill>
-              <a:effectLst/>
-              <a:uFillTx/>
-              <a:latin typeface="Arial"/>
-            </a:endParaRPr>
-          </a:p>
-          <a:p>
-            <a:pPr defTabSz="457200">
-              <a:lnSpc>
-                <a:spcPct val="100000"/>
-              </a:lnSpc>
-              <a:spcAft>
-                <a:spcPts val="1199"/>
-              </a:spcAft>
-            </a:pPr>
-            <a:r>
-              <a:rPr lang="en-US" sz="1400" b="0" u="none" strike="noStrike">
-                <a:solidFill>
-                  <a:srgbClr val="28323C"/>
-                </a:solidFill>
-                <a:effectLst/>
-                <a:uFillTx/>
-                <a:latin typeface="Arial"/>
-              </a:rPr>
-              <a:t>  - Componente transversal (utils.py): Lógica temporal de fechas, aritmética de control ISBN y saneamiento binario de subidas.</a:t>
-            </a:r>
-            <a:endParaRPr lang="es-ES" sz="1400" b="0" u="none" strike="noStrike">
+              <a:t>Lógica temporal de fechas, algoritmos de validación matemática por suma ponderada para el control de ISBN (10 y 13) y saneamiento binario estricto de subidas multimedia.</a:t>
+            </a:r>
+            <a:endParaRPr lang="es-ES" sz="1100" b="0" u="none" strike="noStrike">
               <a:solidFill>
                 <a:srgbClr val="000000"/>
               </a:solidFill>
@@ -8462,14 +9473,14 @@
       </p:grpSpPr>
       <p:sp>
         <p:nvSpPr>
-          <p:cNvPr id="71" name="TextBox 1"/>
+          <p:cNvPr id="86" name="TextBox 1"/>
           <p:cNvSpPr/>
           <p:nvPr/>
         </p:nvSpPr>
         <p:spPr>
           <a:xfrm>
             <a:off x="731520" y="365760"/>
-            <a:ext cx="10728360" cy="731160"/>
+            <a:ext cx="10728360" cy="517320"/>
           </a:xfrm>
           <a:prstGeom prst="rect">
             <a:avLst/>
@@ -8486,7 +9497,7 @@
           <a:fontRef idx="minor"/>
         </p:style>
         <p:txBody>
-          <a:bodyPr lIns="0" tIns="0" rIns="90000" bIns="45000" anchor="t">
+          <a:bodyPr lIns="90000" tIns="45000" rIns="90000" bIns="45000" anchor="t">
             <a:spAutoFit/>
           </a:bodyPr>
           <a:p>
@@ -8496,7 +9507,7 @@
               </a:lnSpc>
             </a:pPr>
             <a:r>
-              <a:rPr lang="en-US" sz="2800" b="0" u="none" strike="noStrike">
+              <a:rPr lang="es-ES" sz="2800" b="0" u="none" strike="noStrike">
                 <a:solidFill>
                   <a:srgbClr val="1E3A5F"/>
                 </a:solidFill>
@@ -8519,14 +9530,14 @@
       </p:sp>
       <p:sp>
         <p:nvSpPr>
-          <p:cNvPr id="72" name="Rectangle 2"/>
+          <p:cNvPr id="87" name="Rectangle 2"/>
           <p:cNvSpPr/>
           <p:nvPr/>
         </p:nvSpPr>
         <p:spPr>
           <a:xfrm>
-            <a:off x="731520" y="1188720"/>
-            <a:ext cx="10728360" cy="27000"/>
+            <a:off x="731520" y="1097280"/>
+            <a:ext cx="10728360" cy="18000"/>
           </a:xfrm>
           <a:prstGeom prst="rect">
             <a:avLst/>
@@ -8535,8 +9546,66 @@
             <a:srgbClr val="B8860B"/>
           </a:solidFill>
           <a:ln>
+            <a:noFill/>
+          </a:ln>
+          <a:effectLst>
+            <a:outerShdw blurRad="39960" dir="5400000" dist="23040" rotWithShape="0">
+              <a:srgbClr val="000000">
+                <a:alpha val="35000"/>
+              </a:srgbClr>
+            </a:outerShdw>
+          </a:effectLst>
+        </p:spPr>
+        <p:style>
+          <a:lnRef idx="1">
+            <a:schemeClr val="accent1"/>
+          </a:lnRef>
+          <a:fillRef idx="3">
+            <a:schemeClr val="accent1"/>
+          </a:fillRef>
+          <a:effectRef idx="2">
+            <a:schemeClr val="accent1"/>
+          </a:effectRef>
+          <a:fontRef idx="minor"/>
+        </p:style>
+        <p:txBody>
+          <a:bodyPr lIns="90000" tIns="-26640" rIns="90000" bIns="-26640" anchor="ctr">
+            <a:noAutofit/>
+          </a:bodyPr>
+          <a:p>
+            <a:endParaRPr lang="es-ES" sz="1800" b="0" u="none" strike="noStrike">
+              <a:solidFill>
+                <a:schemeClr val="lt1"/>
+              </a:solidFill>
+              <a:effectLst/>
+              <a:uFillTx/>
+              <a:latin typeface="Calibri"/>
+            </a:endParaRPr>
+          </a:p>
+        </p:txBody>
+      </p:sp>
+      <p:sp>
+        <p:nvSpPr>
+          <p:cNvPr id="88" name="Rounded Rectangle 3"/>
+          <p:cNvSpPr/>
+          <p:nvPr/>
+        </p:nvSpPr>
+        <p:spPr>
+          <a:xfrm>
+            <a:off x="731520" y="1371600"/>
+            <a:ext cx="10728360" cy="1005480"/>
+          </a:xfrm>
+          <a:prstGeom prst="roundRect">
+            <a:avLst>
+              <a:gd name="adj" fmla="val 16667"/>
+            </a:avLst>
+          </a:prstGeom>
+          <a:solidFill>
+            <a:srgbClr val="FFFFFF"/>
+          </a:solidFill>
+          <a:ln w="12700">
             <a:solidFill>
-              <a:srgbClr val="B8860B"/>
+              <a:srgbClr val="E6D7B4"/>
             </a:solidFill>
             <a:round/>
           </a:ln>
@@ -8561,11 +9630,11 @@
           <a:fontRef idx="minor"/>
         </p:style>
         <p:txBody>
-          <a:bodyPr lIns="90000" tIns="-17640" rIns="90000" bIns="-17640" anchor="ctr">
+          <a:bodyPr lIns="90000" tIns="45000" rIns="90000" bIns="45000" anchor="ctr">
             <a:noAutofit/>
           </a:bodyPr>
           <a:p>
-            <a:endParaRPr lang="en-US" sz="1800" b="0" u="none" strike="noStrike">
+            <a:endParaRPr lang="es-ES" sz="1800" b="0" u="none" strike="noStrike">
               <a:solidFill>
                 <a:schemeClr val="lt1"/>
               </a:solidFill>
@@ -8578,14 +9647,14 @@
       </p:sp>
       <p:sp>
         <p:nvSpPr>
-          <p:cNvPr id="73" name="TextBox 3"/>
+          <p:cNvPr id="89" name="TextBox 4"/>
           <p:cNvSpPr/>
           <p:nvPr/>
         </p:nvSpPr>
         <p:spPr>
           <a:xfrm>
-            <a:off x="731520" y="1554480"/>
-            <a:ext cx="10728360" cy="4754520"/>
+            <a:off x="914400" y="1554480"/>
+            <a:ext cx="10362600" cy="740160"/>
           </a:xfrm>
           <a:prstGeom prst="rect">
             <a:avLst/>
@@ -8602,7 +9671,7 @@
           <a:fontRef idx="minor"/>
         </p:style>
         <p:txBody>
-          <a:bodyPr lIns="0" tIns="0" rIns="0" bIns="0" anchor="t">
+          <a:bodyPr lIns="90000" tIns="45000" rIns="90000" bIns="45000" anchor="t">
             <a:spAutoFit/>
           </a:bodyPr>
           <a:p>
@@ -8611,11 +9680,40 @@
                 <a:spcPct val="100000"/>
               </a:lnSpc>
               <a:spcAft>
-                <a:spcPts val="1199"/>
+                <a:spcPts val="799"/>
               </a:spcAft>
             </a:pPr>
             <a:r>
-              <a:rPr lang="en-US" sz="1400" b="0" u="none" strike="noStrike">
+              <a:rPr lang="es-ES" sz="1400" b="0" u="none" strike="noStrike">
+                <a:solidFill>
+                  <a:srgbClr val="1E3A5F"/>
+                </a:solidFill>
+                <a:effectLst/>
+                <a:uFillTx/>
+                <a:latin typeface="Arial"/>
+              </a:rPr>
+              <a:t>Motor y Justificación Teórica de Diseño</a:t>
+            </a:r>
+            <a:endParaRPr lang="es-ES" sz="1400" b="0" u="none" strike="noStrike">
+              <a:solidFill>
+                <a:srgbClr val="000000"/>
+              </a:solidFill>
+              <a:effectLst/>
+              <a:uFillTx/>
+              <a:latin typeface="Arial"/>
+            </a:endParaRPr>
+          </a:p>
+          <a:p>
+            <a:pPr defTabSz="457200">
+              <a:lnSpc>
+                <a:spcPct val="100000"/>
+              </a:lnSpc>
+              <a:spcAft>
+                <a:spcPts val="601"/>
+              </a:spcAft>
+            </a:pPr>
+            <a:r>
+              <a:rPr lang="es-ES" sz="1100" b="0" u="none" strike="noStrike">
                 <a:solidFill>
                   <a:srgbClr val="28323C"/>
                 </a:solidFill>
@@ -8623,7 +9721,128 @@
                 <a:uFillTx/>
                 <a:latin typeface="Arial"/>
               </a:rPr>
-              <a:t>• Motor de almacenamiento: SQLite integrado localmente en el servidor.</a:t>
+              <a:t>Uso de SQLite integrado localmente. Justificación: Se habilitó el control activo de claves foráneas y una normalización estricta para asegurar la consistencia del catálogo global e impedir de forma algorítmica la corrupción de inventario por títulos duplicados.</a:t>
+            </a:r>
+            <a:endParaRPr lang="es-ES" sz="1100" b="0" u="none" strike="noStrike">
+              <a:solidFill>
+                <a:srgbClr val="000000"/>
+              </a:solidFill>
+              <a:effectLst/>
+              <a:uFillTx/>
+              <a:latin typeface="Arial"/>
+            </a:endParaRPr>
+          </a:p>
+        </p:txBody>
+      </p:sp>
+      <p:sp>
+        <p:nvSpPr>
+          <p:cNvPr id="90" name="Rounded Rectangle 5"/>
+          <p:cNvSpPr/>
+          <p:nvPr/>
+        </p:nvSpPr>
+        <p:spPr>
+          <a:xfrm>
+            <a:off x="731520" y="2560320"/>
+            <a:ext cx="3291480" cy="3657240"/>
+          </a:xfrm>
+          <a:prstGeom prst="roundRect">
+            <a:avLst>
+              <a:gd name="adj" fmla="val 16667"/>
+            </a:avLst>
+          </a:prstGeom>
+          <a:solidFill>
+            <a:srgbClr val="FFFFFF"/>
+          </a:solidFill>
+          <a:ln w="12700">
+            <a:solidFill>
+              <a:srgbClr val="E6D7B4"/>
+            </a:solidFill>
+            <a:round/>
+          </a:ln>
+          <a:effectLst>
+            <a:outerShdw blurRad="39960" dir="5400000" dist="23040" rotWithShape="0">
+              <a:srgbClr val="000000">
+                <a:alpha val="35000"/>
+              </a:srgbClr>
+            </a:outerShdw>
+          </a:effectLst>
+        </p:spPr>
+        <p:style>
+          <a:lnRef idx="1">
+            <a:schemeClr val="accent1"/>
+          </a:lnRef>
+          <a:fillRef idx="3">
+            <a:schemeClr val="accent1"/>
+          </a:fillRef>
+          <a:effectRef idx="2">
+            <a:schemeClr val="accent1"/>
+          </a:effectRef>
+          <a:fontRef idx="minor"/>
+        </p:style>
+        <p:txBody>
+          <a:bodyPr lIns="90000" tIns="45000" rIns="90000" bIns="45000" anchor="ctr">
+            <a:noAutofit/>
+          </a:bodyPr>
+          <a:p>
+            <a:endParaRPr lang="es-ES" sz="1800" b="0" u="none" strike="noStrike">
+              <a:solidFill>
+                <a:schemeClr val="lt1"/>
+              </a:solidFill>
+              <a:effectLst/>
+              <a:uFillTx/>
+              <a:latin typeface="Calibri"/>
+            </a:endParaRPr>
+          </a:p>
+        </p:txBody>
+      </p:sp>
+      <p:sp>
+        <p:nvSpPr>
+          <p:cNvPr id="91" name="TextBox 6"/>
+          <p:cNvSpPr/>
+          <p:nvPr/>
+        </p:nvSpPr>
+        <p:spPr>
+          <a:xfrm>
+            <a:off x="914400" y="2743200"/>
+            <a:ext cx="2925720" cy="1244160"/>
+          </a:xfrm>
+          <a:prstGeom prst="rect">
+            <a:avLst/>
+          </a:prstGeom>
+          <a:noFill/>
+          <a:ln w="0">
+            <a:noFill/>
+          </a:ln>
+        </p:spPr>
+        <p:style>
+          <a:lnRef idx="0"/>
+          <a:fillRef idx="0"/>
+          <a:effectRef idx="0"/>
+          <a:fontRef idx="minor"/>
+        </p:style>
+        <p:txBody>
+          <a:bodyPr lIns="90000" tIns="45000" rIns="90000" bIns="45000" anchor="t">
+            <a:spAutoFit/>
+          </a:bodyPr>
+          <a:p>
+            <a:pPr defTabSz="457200">
+              <a:lnSpc>
+                <a:spcPct val="100000"/>
+              </a:lnSpc>
+              <a:spcAft>
+                <a:spcPts val="799"/>
+              </a:spcAft>
+            </a:pPr>
+            <a:r>
+              <a:rPr lang="es-ES" sz="1400" b="0" u="none" strike="noStrike">
+                <a:solidFill>
+                  <a:srgbClr val="1E3A5F"/>
+                </a:solidFill>
+                <a:effectLst/>
+                <a:uFillTx/>
+                <a:latin typeface="Arial"/>
+              </a:rPr>
+              <a:t>Tabla usuarios</a:t>
             </a:r>
             <a:endParaRPr lang="es-ES" sz="1400" b="0" u="none" strike="noStrike">
               <a:solidFill>
@@ -8640,11 +9859,11 @@
                 <a:spcPct val="100000"/>
               </a:lnSpc>
               <a:spcAft>
-                <a:spcPts val="1199"/>
+                <a:spcPts val="601"/>
               </a:spcAft>
             </a:pPr>
             <a:r>
-              <a:rPr lang="en-US" sz="1400" b="0" u="none" strike="noStrike">
+              <a:rPr lang="es-ES" sz="1100" b="0" u="none" strike="noStrike">
                 <a:solidFill>
                   <a:srgbClr val="28323C"/>
                 </a:solidFill>
@@ -8652,7 +9871,128 @@
                 <a:uFillTx/>
                 <a:latin typeface="Arial"/>
               </a:rPr>
-              <a:t>• Consistencia de datos: Integridad referencial habilitada mediante el control activo de claves foráneas.</a:t>
+              <a:t>Entidad independiente encargada de resguardar de forma segura las credenciales de acceso (hashes criptográficos con la librería nativa bcrypt) y las fechas de alta.</a:t>
+            </a:r>
+            <a:endParaRPr lang="es-ES" sz="1100" b="0" u="none" strike="noStrike">
+              <a:solidFill>
+                <a:srgbClr val="000000"/>
+              </a:solidFill>
+              <a:effectLst/>
+              <a:uFillTx/>
+              <a:latin typeface="Arial"/>
+            </a:endParaRPr>
+          </a:p>
+        </p:txBody>
+      </p:sp>
+      <p:sp>
+        <p:nvSpPr>
+          <p:cNvPr id="92" name="Rounded Rectangle 7"/>
+          <p:cNvSpPr/>
+          <p:nvPr/>
+        </p:nvSpPr>
+        <p:spPr>
+          <a:xfrm>
+            <a:off x="4389120" y="2560320"/>
+            <a:ext cx="3291480" cy="3657240"/>
+          </a:xfrm>
+          <a:prstGeom prst="roundRect">
+            <a:avLst>
+              <a:gd name="adj" fmla="val 16667"/>
+            </a:avLst>
+          </a:prstGeom>
+          <a:solidFill>
+            <a:srgbClr val="FFFFFF"/>
+          </a:solidFill>
+          <a:ln w="12700">
+            <a:solidFill>
+              <a:srgbClr val="E6D7B4"/>
+            </a:solidFill>
+            <a:round/>
+          </a:ln>
+          <a:effectLst>
+            <a:outerShdw blurRad="39960" dir="5400000" dist="23040" rotWithShape="0">
+              <a:srgbClr val="000000">
+                <a:alpha val="35000"/>
+              </a:srgbClr>
+            </a:outerShdw>
+          </a:effectLst>
+        </p:spPr>
+        <p:style>
+          <a:lnRef idx="1">
+            <a:schemeClr val="accent1"/>
+          </a:lnRef>
+          <a:fillRef idx="3">
+            <a:schemeClr val="accent1"/>
+          </a:fillRef>
+          <a:effectRef idx="2">
+            <a:schemeClr val="accent1"/>
+          </a:effectRef>
+          <a:fontRef idx="minor"/>
+        </p:style>
+        <p:txBody>
+          <a:bodyPr lIns="90000" tIns="45000" rIns="90000" bIns="45000" anchor="ctr">
+            <a:noAutofit/>
+          </a:bodyPr>
+          <a:p>
+            <a:endParaRPr lang="es-ES" sz="1800" b="0" u="none" strike="noStrike">
+              <a:solidFill>
+                <a:schemeClr val="lt1"/>
+              </a:solidFill>
+              <a:effectLst/>
+              <a:uFillTx/>
+              <a:latin typeface="Calibri"/>
+            </a:endParaRPr>
+          </a:p>
+        </p:txBody>
+      </p:sp>
+      <p:sp>
+        <p:nvSpPr>
+          <p:cNvPr id="93" name="TextBox 8"/>
+          <p:cNvSpPr/>
+          <p:nvPr/>
+        </p:nvSpPr>
+        <p:spPr>
+          <a:xfrm>
+            <a:off x="4572000" y="2743200"/>
+            <a:ext cx="2925720" cy="1244160"/>
+          </a:xfrm>
+          <a:prstGeom prst="rect">
+            <a:avLst/>
+          </a:prstGeom>
+          <a:noFill/>
+          <a:ln w="0">
+            <a:noFill/>
+          </a:ln>
+        </p:spPr>
+        <p:style>
+          <a:lnRef idx="0"/>
+          <a:fillRef idx="0"/>
+          <a:effectRef idx="0"/>
+          <a:fontRef idx="minor"/>
+        </p:style>
+        <p:txBody>
+          <a:bodyPr lIns="90000" tIns="45000" rIns="90000" bIns="45000" anchor="t">
+            <a:spAutoFit/>
+          </a:bodyPr>
+          <a:p>
+            <a:pPr defTabSz="457200">
+              <a:lnSpc>
+                <a:spcPct val="100000"/>
+              </a:lnSpc>
+              <a:spcAft>
+                <a:spcPts val="799"/>
+              </a:spcAft>
+            </a:pPr>
+            <a:r>
+              <a:rPr lang="es-ES" sz="1400" b="0" u="none" strike="noStrike">
+                <a:solidFill>
+                  <a:srgbClr val="1E3A5F"/>
+                </a:solidFill>
+                <a:effectLst/>
+                <a:uFillTx/>
+                <a:latin typeface="Arial"/>
+              </a:rPr>
+              <a:t>Tabla libros_comunes</a:t>
             </a:r>
             <a:endParaRPr lang="es-ES" sz="1400" b="0" u="none" strike="noStrike">
               <a:solidFill>
@@ -8669,11 +10009,11 @@
                 <a:spcPct val="100000"/>
               </a:lnSpc>
               <a:spcAft>
-                <a:spcPts val="1199"/>
+                <a:spcPts val="601"/>
               </a:spcAft>
             </a:pPr>
             <a:r>
-              <a:rPr lang="en-US" sz="1400" b="0" u="none" strike="noStrike">
+              <a:rPr lang="es-ES" sz="1100" b="0" u="none" strike="noStrike">
                 <a:solidFill>
                   <a:srgbClr val="28323C"/>
                 </a:solidFill>
@@ -8681,7 +10021,128 @@
                 <a:uFillTx/>
                 <a:latin typeface="Arial"/>
               </a:rPr>
-              <a:t>• Estructura relacional de las tablas:</a:t>
+              <a:t>Catálogo global indexado mediante restricciones de unicidad sobre los formatos independientes ISBN-10 e ISBN-13, blindando la integridad de las fichas de las obras.</a:t>
+            </a:r>
+            <a:endParaRPr lang="es-ES" sz="1100" b="0" u="none" strike="noStrike">
+              <a:solidFill>
+                <a:srgbClr val="000000"/>
+              </a:solidFill>
+              <a:effectLst/>
+              <a:uFillTx/>
+              <a:latin typeface="Arial"/>
+            </a:endParaRPr>
+          </a:p>
+        </p:txBody>
+      </p:sp>
+      <p:sp>
+        <p:nvSpPr>
+          <p:cNvPr id="94" name="Rounded Rectangle 9"/>
+          <p:cNvSpPr/>
+          <p:nvPr/>
+        </p:nvSpPr>
+        <p:spPr>
+          <a:xfrm>
+            <a:off x="8046720" y="2560320"/>
+            <a:ext cx="3291480" cy="3657240"/>
+          </a:xfrm>
+          <a:prstGeom prst="roundRect">
+            <a:avLst>
+              <a:gd name="adj" fmla="val 16667"/>
+            </a:avLst>
+          </a:prstGeom>
+          <a:solidFill>
+            <a:srgbClr val="FFFFFF"/>
+          </a:solidFill>
+          <a:ln w="12700">
+            <a:solidFill>
+              <a:srgbClr val="E6D7B4"/>
+            </a:solidFill>
+            <a:round/>
+          </a:ln>
+          <a:effectLst>
+            <a:outerShdw blurRad="39960" dir="5400000" dist="23040" rotWithShape="0">
+              <a:srgbClr val="000000">
+                <a:alpha val="35000"/>
+              </a:srgbClr>
+            </a:outerShdw>
+          </a:effectLst>
+        </p:spPr>
+        <p:style>
+          <a:lnRef idx="1">
+            <a:schemeClr val="accent1"/>
+          </a:lnRef>
+          <a:fillRef idx="3">
+            <a:schemeClr val="accent1"/>
+          </a:fillRef>
+          <a:effectRef idx="2">
+            <a:schemeClr val="accent1"/>
+          </a:effectRef>
+          <a:fontRef idx="minor"/>
+        </p:style>
+        <p:txBody>
+          <a:bodyPr lIns="90000" tIns="45000" rIns="90000" bIns="45000" anchor="ctr">
+            <a:noAutofit/>
+          </a:bodyPr>
+          <a:p>
+            <a:endParaRPr lang="es-ES" sz="1800" b="0" u="none" strike="noStrike">
+              <a:solidFill>
+                <a:schemeClr val="lt1"/>
+              </a:solidFill>
+              <a:effectLst/>
+              <a:uFillTx/>
+              <a:latin typeface="Calibri"/>
+            </a:endParaRPr>
+          </a:p>
+        </p:txBody>
+      </p:sp>
+      <p:sp>
+        <p:nvSpPr>
+          <p:cNvPr id="95" name="TextBox 10"/>
+          <p:cNvSpPr/>
+          <p:nvPr/>
+        </p:nvSpPr>
+        <p:spPr>
+          <a:xfrm>
+            <a:off x="8229600" y="2743200"/>
+            <a:ext cx="2925720" cy="1244160"/>
+          </a:xfrm>
+          <a:prstGeom prst="rect">
+            <a:avLst/>
+          </a:prstGeom>
+          <a:noFill/>
+          <a:ln w="0">
+            <a:noFill/>
+          </a:ln>
+        </p:spPr>
+        <p:style>
+          <a:lnRef idx="0"/>
+          <a:fillRef idx="0"/>
+          <a:effectRef idx="0"/>
+          <a:fontRef idx="minor"/>
+        </p:style>
+        <p:txBody>
+          <a:bodyPr lIns="90000" tIns="45000" rIns="90000" bIns="45000" anchor="t">
+            <a:spAutoFit/>
+          </a:bodyPr>
+          <a:p>
+            <a:pPr defTabSz="457200">
+              <a:lnSpc>
+                <a:spcPct val="100000"/>
+              </a:lnSpc>
+              <a:spcAft>
+                <a:spcPts val="799"/>
+              </a:spcAft>
+            </a:pPr>
+            <a:r>
+              <a:rPr lang="es-ES" sz="1400" b="0" u="none" strike="noStrike">
+                <a:solidFill>
+                  <a:srgbClr val="1E3A5F"/>
+                </a:solidFill>
+                <a:effectLst/>
+                <a:uFillTx/>
+                <a:latin typeface="Arial"/>
+              </a:rPr>
+              <a:t>Tabla biblioteca_usuario</a:t>
             </a:r>
             <a:endParaRPr lang="es-ES" sz="1400" b="0" u="none" strike="noStrike">
               <a:solidFill>
@@ -8698,11 +10159,11 @@
                 <a:spcPct val="100000"/>
               </a:lnSpc>
               <a:spcAft>
-                <a:spcPts val="1199"/>
+                <a:spcPts val="601"/>
               </a:spcAft>
             </a:pPr>
             <a:r>
-              <a:rPr lang="en-US" sz="1400" b="0" u="none" strike="noStrike">
+              <a:rPr lang="es-ES" sz="1100" b="0" u="none" strike="noStrike">
                 <a:solidFill>
                   <a:srgbClr val="28323C"/>
                 </a:solidFill>
@@ -8710,67 +10171,9 @@
                 <a:uFillTx/>
                 <a:latin typeface="Arial"/>
               </a:rPr>
-              <a:t>  - Tabla usuarios: Entidad encargada de resguardar credenciales y fechas de registro de cuentas.</a:t>
-            </a:r>
-            <a:endParaRPr lang="es-ES" sz="1400" b="0" u="none" strike="noStrike">
-              <a:solidFill>
-                <a:srgbClr val="000000"/>
-              </a:solidFill>
-              <a:effectLst/>
-              <a:uFillTx/>
-              <a:latin typeface="Arial"/>
-            </a:endParaRPr>
-          </a:p>
-          <a:p>
-            <a:pPr defTabSz="457200">
-              <a:lnSpc>
-                <a:spcPct val="100000"/>
-              </a:lnSpc>
-              <a:spcAft>
-                <a:spcPts val="1199"/>
-              </a:spcAft>
-            </a:pPr>
-            <a:r>
-              <a:rPr lang="en-US" sz="1400" b="0" u="none" strike="noStrike">
-                <a:solidFill>
-                  <a:srgbClr val="28323C"/>
-                </a:solidFill>
-                <a:effectLst/>
-                <a:uFillTx/>
-                <a:latin typeface="Arial"/>
-              </a:rPr>
-              <a:t>  - Tabla libros_comunes: Catálogo global unificado e indexado a través de restricciones de unicidad sobre formatos de ISBN-10 e ISBN-13.</a:t>
-            </a:r>
-            <a:endParaRPr lang="es-ES" sz="1400" b="0" u="none" strike="noStrike">
-              <a:solidFill>
-                <a:srgbClr val="000000"/>
-              </a:solidFill>
-              <a:effectLst/>
-              <a:uFillTx/>
-              <a:latin typeface="Arial"/>
-            </a:endParaRPr>
-          </a:p>
-          <a:p>
-            <a:pPr defTabSz="457200">
-              <a:lnSpc>
-                <a:spcPct val="100000"/>
-              </a:lnSpc>
-              <a:spcAft>
-                <a:spcPts val="1199"/>
-              </a:spcAft>
-            </a:pPr>
-            <a:r>
-              <a:rPr lang="en-US" sz="1400" b="0" u="none" strike="noStrike">
-                <a:solidFill>
-                  <a:srgbClr val="28323C"/>
-                </a:solidFill>
-                <a:effectLst/>
-                <a:uFillTx/>
-                <a:latin typeface="Arial"/>
-              </a:rPr>
-              <a:t>  - Tabla biblioteca_usuario: Tabla de ruptura relacional muchos a muchos que vincula de manera exclusiva a cada lector con sus obras de seguimiento, preservando de forma aislada los estados de progreso, marcas cronológicas y páginas consumidas en lecturas o abandonos.</a:t>
-            </a:r>
-            <a:endParaRPr lang="es-ES" sz="1400" b="0" u="none" strike="noStrike">
+              <a:t>Tabla asociativa muchos a muchos. Asocia de forma exclusiva a cada usuario con sus lecturas, preservando estados de progreso, marcas cronológicas e interrupciones sin alterar el catálogo máster.</a:t>
+            </a:r>
+            <a:endParaRPr lang="es-ES" sz="1100" b="0" u="none" strike="noStrike">
               <a:solidFill>
                 <a:srgbClr val="000000"/>
               </a:solidFill>
@@ -8820,14 +10223,14 @@
       </p:grpSpPr>
       <p:sp>
         <p:nvSpPr>
-          <p:cNvPr id="74" name="TextBox 1"/>
+          <p:cNvPr id="96" name="TextBox 1"/>
           <p:cNvSpPr/>
           <p:nvPr/>
         </p:nvSpPr>
         <p:spPr>
           <a:xfrm>
             <a:off x="731520" y="365760"/>
-            <a:ext cx="10728360" cy="731160"/>
+            <a:ext cx="10728360" cy="517320"/>
           </a:xfrm>
           <a:prstGeom prst="rect">
             <a:avLst/>
@@ -8844,7 +10247,7 @@
           <a:fontRef idx="minor"/>
         </p:style>
         <p:txBody>
-          <a:bodyPr lIns="0" tIns="0" rIns="90000" bIns="45000" anchor="t">
+          <a:bodyPr lIns="90000" tIns="45000" rIns="90000" bIns="45000" anchor="t">
             <a:spAutoFit/>
           </a:bodyPr>
           <a:p>
@@ -8854,7 +10257,7 @@
               </a:lnSpc>
             </a:pPr>
             <a:r>
-              <a:rPr lang="en-US" sz="2800" b="0" u="none" strike="noStrike">
+              <a:rPr lang="es-ES" sz="2800" b="0" u="none" strike="noStrike">
                 <a:solidFill>
                   <a:srgbClr val="1E3A5F"/>
                 </a:solidFill>
@@ -8877,14 +10280,14 @@
       </p:sp>
       <p:sp>
         <p:nvSpPr>
-          <p:cNvPr id="75" name="Rectangle 2"/>
+          <p:cNvPr id="97" name="Rectangle 2"/>
           <p:cNvSpPr/>
           <p:nvPr/>
         </p:nvSpPr>
         <p:spPr>
           <a:xfrm>
-            <a:off x="731520" y="1188720"/>
-            <a:ext cx="10728360" cy="27000"/>
+            <a:off x="731520" y="1097280"/>
+            <a:ext cx="10728360" cy="18000"/>
           </a:xfrm>
           <a:prstGeom prst="rect">
             <a:avLst/>
@@ -8893,8 +10296,66 @@
             <a:srgbClr val="B8860B"/>
           </a:solidFill>
           <a:ln>
+            <a:noFill/>
+          </a:ln>
+          <a:effectLst>
+            <a:outerShdw blurRad="39960" dir="5400000" dist="23040" rotWithShape="0">
+              <a:srgbClr val="000000">
+                <a:alpha val="35000"/>
+              </a:srgbClr>
+            </a:outerShdw>
+          </a:effectLst>
+        </p:spPr>
+        <p:style>
+          <a:lnRef idx="1">
+            <a:schemeClr val="accent1"/>
+          </a:lnRef>
+          <a:fillRef idx="3">
+            <a:schemeClr val="accent1"/>
+          </a:fillRef>
+          <a:effectRef idx="2">
+            <a:schemeClr val="accent1"/>
+          </a:effectRef>
+          <a:fontRef idx="minor"/>
+        </p:style>
+        <p:txBody>
+          <a:bodyPr lIns="90000" tIns="-26640" rIns="90000" bIns="-26640" anchor="ctr">
+            <a:noAutofit/>
+          </a:bodyPr>
+          <a:p>
+            <a:endParaRPr lang="es-ES" sz="1800" b="0" u="none" strike="noStrike">
+              <a:solidFill>
+                <a:schemeClr val="lt1"/>
+              </a:solidFill>
+              <a:effectLst/>
+              <a:uFillTx/>
+              <a:latin typeface="Calibri"/>
+            </a:endParaRPr>
+          </a:p>
+        </p:txBody>
+      </p:sp>
+      <p:sp>
+        <p:nvSpPr>
+          <p:cNvPr id="98" name="Rounded Rectangle 3"/>
+          <p:cNvSpPr/>
+          <p:nvPr/>
+        </p:nvSpPr>
+        <p:spPr>
+          <a:xfrm>
+            <a:off x="731520" y="1463040"/>
+            <a:ext cx="10728360" cy="1096920"/>
+          </a:xfrm>
+          <a:prstGeom prst="roundRect">
+            <a:avLst>
+              <a:gd name="adj" fmla="val 16667"/>
+            </a:avLst>
+          </a:prstGeom>
+          <a:solidFill>
+            <a:srgbClr val="FFFFFF"/>
+          </a:solidFill>
+          <a:ln w="12700">
             <a:solidFill>
-              <a:srgbClr val="B8860B"/>
+              <a:srgbClr val="E6D7B4"/>
             </a:solidFill>
             <a:round/>
           </a:ln>
@@ -8919,11 +10380,11 @@
           <a:fontRef idx="minor"/>
         </p:style>
         <p:txBody>
-          <a:bodyPr lIns="90000" tIns="-17640" rIns="90000" bIns="-17640" anchor="ctr">
+          <a:bodyPr lIns="90000" tIns="45000" rIns="90000" bIns="45000" anchor="ctr">
             <a:noAutofit/>
           </a:bodyPr>
           <a:p>
-            <a:endParaRPr lang="en-US" sz="1800" b="0" u="none" strike="noStrike">
+            <a:endParaRPr lang="es-ES" sz="1800" b="0" u="none" strike="noStrike">
               <a:solidFill>
                 <a:schemeClr val="lt1"/>
               </a:solidFill>
@@ -8936,14 +10397,14 @@
       </p:sp>
       <p:sp>
         <p:nvSpPr>
-          <p:cNvPr id="76" name="TextBox 3"/>
+          <p:cNvPr id="99" name="TextBox 4"/>
           <p:cNvSpPr/>
           <p:nvPr/>
         </p:nvSpPr>
         <p:spPr>
           <a:xfrm>
-            <a:off x="731520" y="1554480"/>
-            <a:ext cx="10728360" cy="4754520"/>
+            <a:off x="914400" y="1645920"/>
+            <a:ext cx="10362600" cy="740160"/>
           </a:xfrm>
           <a:prstGeom prst="rect">
             <a:avLst/>
@@ -8960,7 +10421,7 @@
           <a:fontRef idx="minor"/>
         </p:style>
         <p:txBody>
-          <a:bodyPr lIns="0" tIns="0" rIns="0" bIns="0" anchor="t">
+          <a:bodyPr lIns="90000" tIns="45000" rIns="90000" bIns="45000" anchor="t">
             <a:spAutoFit/>
           </a:bodyPr>
           <a:p>
@@ -8969,11 +10430,40 @@
                 <a:spcPct val="100000"/>
               </a:lnSpc>
               <a:spcAft>
-                <a:spcPts val="1199"/>
+                <a:spcPts val="799"/>
               </a:spcAft>
             </a:pPr>
             <a:r>
-              <a:rPr lang="en-US" sz="1400" b="0" u="none" strike="noStrike">
+              <a:rPr lang="es-ES" sz="1400" b="0" u="none" strike="noStrike">
+                <a:solidFill>
+                  <a:srgbClr val="1E3A5F"/>
+                </a:solidFill>
+                <a:effectLst/>
+                <a:uFillTx/>
+                <a:latin typeface="Arial"/>
+              </a:rPr>
+              <a:t>Protección Criptográfica</a:t>
+            </a:r>
+            <a:endParaRPr lang="es-ES" sz="1400" b="0" u="none" strike="noStrike">
+              <a:solidFill>
+                <a:srgbClr val="000000"/>
+              </a:solidFill>
+              <a:effectLst/>
+              <a:uFillTx/>
+              <a:latin typeface="Arial"/>
+            </a:endParaRPr>
+          </a:p>
+          <a:p>
+            <a:pPr defTabSz="457200">
+              <a:lnSpc>
+                <a:spcPct val="100000"/>
+              </a:lnSpc>
+              <a:spcAft>
+                <a:spcPts val="601"/>
+              </a:spcAft>
+            </a:pPr>
+            <a:r>
+              <a:rPr lang="es-ES" sz="1100" b="0" u="none" strike="noStrike">
                 <a:solidFill>
                   <a:srgbClr val="28323C"/>
                 </a:solidFill>
@@ -8981,7 +10471,128 @@
                 <a:uFillTx/>
                 <a:latin typeface="Arial"/>
               </a:rPr>
-              <a:t>• Protección criptográfica: Hashing adaptativo de contraseñas utilizando el algoritmo bcrypt ejecutado de manera nativa en el servidor.</a:t>
+              <a:t>Hashing adaptativo de contraseñas utilizando el algoritmo estándar seguro bcrypt ejecutado de manera totalmente nativa en el servidor, eliminando dependencias obsoletas.</a:t>
+            </a:r>
+            <a:endParaRPr lang="es-ES" sz="1100" b="0" u="none" strike="noStrike">
+              <a:solidFill>
+                <a:srgbClr val="000000"/>
+              </a:solidFill>
+              <a:effectLst/>
+              <a:uFillTx/>
+              <a:latin typeface="Arial"/>
+            </a:endParaRPr>
+          </a:p>
+        </p:txBody>
+      </p:sp>
+      <p:sp>
+        <p:nvSpPr>
+          <p:cNvPr id="100" name="Rounded Rectangle 5"/>
+          <p:cNvSpPr/>
+          <p:nvPr/>
+        </p:nvSpPr>
+        <p:spPr>
+          <a:xfrm>
+            <a:off x="731520" y="2651760"/>
+            <a:ext cx="10728360" cy="1096920"/>
+          </a:xfrm>
+          <a:prstGeom prst="roundRect">
+            <a:avLst>
+              <a:gd name="adj" fmla="val 16667"/>
+            </a:avLst>
+          </a:prstGeom>
+          <a:solidFill>
+            <a:srgbClr val="FFFFFF"/>
+          </a:solidFill>
+          <a:ln w="12700">
+            <a:solidFill>
+              <a:srgbClr val="E6D7B4"/>
+            </a:solidFill>
+            <a:round/>
+          </a:ln>
+          <a:effectLst>
+            <a:outerShdw blurRad="39960" dir="5400000" dist="23040" rotWithShape="0">
+              <a:srgbClr val="000000">
+                <a:alpha val="35000"/>
+              </a:srgbClr>
+            </a:outerShdw>
+          </a:effectLst>
+        </p:spPr>
+        <p:style>
+          <a:lnRef idx="1">
+            <a:schemeClr val="accent1"/>
+          </a:lnRef>
+          <a:fillRef idx="3">
+            <a:schemeClr val="accent1"/>
+          </a:fillRef>
+          <a:effectRef idx="2">
+            <a:schemeClr val="accent1"/>
+          </a:effectRef>
+          <a:fontRef idx="minor"/>
+        </p:style>
+        <p:txBody>
+          <a:bodyPr lIns="90000" tIns="45000" rIns="90000" bIns="45000" anchor="ctr">
+            <a:noAutofit/>
+          </a:bodyPr>
+          <a:p>
+            <a:endParaRPr lang="es-ES" sz="1800" b="0" u="none" strike="noStrike">
+              <a:solidFill>
+                <a:schemeClr val="lt1"/>
+              </a:solidFill>
+              <a:effectLst/>
+              <a:uFillTx/>
+              <a:latin typeface="Calibri"/>
+            </a:endParaRPr>
+          </a:p>
+        </p:txBody>
+      </p:sp>
+      <p:sp>
+        <p:nvSpPr>
+          <p:cNvPr id="101" name="TextBox 6"/>
+          <p:cNvSpPr/>
+          <p:nvPr/>
+        </p:nvSpPr>
+        <p:spPr>
+          <a:xfrm>
+            <a:off x="914400" y="2834640"/>
+            <a:ext cx="10362600" cy="740160"/>
+          </a:xfrm>
+          <a:prstGeom prst="rect">
+            <a:avLst/>
+          </a:prstGeom>
+          <a:noFill/>
+          <a:ln w="0">
+            <a:noFill/>
+          </a:ln>
+        </p:spPr>
+        <p:style>
+          <a:lnRef idx="0"/>
+          <a:fillRef idx="0"/>
+          <a:effectRef idx="0"/>
+          <a:fontRef idx="minor"/>
+        </p:style>
+        <p:txBody>
+          <a:bodyPr lIns="90000" tIns="45000" rIns="90000" bIns="45000" anchor="t">
+            <a:spAutoFit/>
+          </a:bodyPr>
+          <a:p>
+            <a:pPr defTabSz="457200">
+              <a:lnSpc>
+                <a:spcPct val="100000"/>
+              </a:lnSpc>
+              <a:spcAft>
+                <a:spcPts val="799"/>
+              </a:spcAft>
+            </a:pPr>
+            <a:r>
+              <a:rPr lang="es-ES" sz="1400" b="0" u="none" strike="noStrike">
+                <a:solidFill>
+                  <a:srgbClr val="1E3A5F"/>
+                </a:solidFill>
+                <a:effectLst/>
+                <a:uFillTx/>
+                <a:latin typeface="Arial"/>
+              </a:rPr>
+              <a:t>Contramedidas contra Ataques de Fuerza Bruta</a:t>
             </a:r>
             <a:endParaRPr lang="es-ES" sz="1400" b="0" u="none" strike="noStrike">
               <a:solidFill>
@@ -8998,11 +10609,11 @@
                 <a:spcPct val="100000"/>
               </a:lnSpc>
               <a:spcAft>
-                <a:spcPts val="1199"/>
+                <a:spcPts val="601"/>
               </a:spcAft>
             </a:pPr>
             <a:r>
-              <a:rPr lang="en-US" sz="1400" b="0" u="none" strike="noStrike">
+              <a:rPr lang="es-ES" sz="1100" b="0" u="none" strike="noStrike">
                 <a:solidFill>
                   <a:srgbClr val="28323C"/>
                 </a:solidFill>
@@ -9010,7 +10621,128 @@
                 <a:uFillTx/>
                 <a:latin typeface="Arial"/>
               </a:rPr>
-              <a:t>• Contramedidas contra ataques de fuerza bruta: Bloqueo temporal del acceso en memoria durante 120 segundos tras acumular cinco fallos de credenciales consecutivos en la misma sesión.</a:t>
+              <a:t>Bloqueo temporal del acceso en memoria durante un periodo de 120 segundos tras acumular un total de cinco fallos de credenciales consecutivos en la misma sesión web.</a:t>
+            </a:r>
+            <a:endParaRPr lang="es-ES" sz="1100" b="0" u="none" strike="noStrike">
+              <a:solidFill>
+                <a:srgbClr val="000000"/>
+              </a:solidFill>
+              <a:effectLst/>
+              <a:uFillTx/>
+              <a:latin typeface="Arial"/>
+            </a:endParaRPr>
+          </a:p>
+        </p:txBody>
+      </p:sp>
+      <p:sp>
+        <p:nvSpPr>
+          <p:cNvPr id="102" name="Rounded Rectangle 7"/>
+          <p:cNvSpPr/>
+          <p:nvPr/>
+        </p:nvSpPr>
+        <p:spPr>
+          <a:xfrm>
+            <a:off x="731520" y="3840480"/>
+            <a:ext cx="10728360" cy="1096920"/>
+          </a:xfrm>
+          <a:prstGeom prst="roundRect">
+            <a:avLst>
+              <a:gd name="adj" fmla="val 16667"/>
+            </a:avLst>
+          </a:prstGeom>
+          <a:solidFill>
+            <a:srgbClr val="FFFFFF"/>
+          </a:solidFill>
+          <a:ln w="12700">
+            <a:solidFill>
+              <a:srgbClr val="E6D7B4"/>
+            </a:solidFill>
+            <a:round/>
+          </a:ln>
+          <a:effectLst>
+            <a:outerShdw blurRad="39960" dir="5400000" dist="23040" rotWithShape="0">
+              <a:srgbClr val="000000">
+                <a:alpha val="35000"/>
+              </a:srgbClr>
+            </a:outerShdw>
+          </a:effectLst>
+        </p:spPr>
+        <p:style>
+          <a:lnRef idx="1">
+            <a:schemeClr val="accent1"/>
+          </a:lnRef>
+          <a:fillRef idx="3">
+            <a:schemeClr val="accent1"/>
+          </a:fillRef>
+          <a:effectRef idx="2">
+            <a:schemeClr val="accent1"/>
+          </a:effectRef>
+          <a:fontRef idx="minor"/>
+        </p:style>
+        <p:txBody>
+          <a:bodyPr lIns="90000" tIns="45000" rIns="90000" bIns="45000" anchor="ctr">
+            <a:noAutofit/>
+          </a:bodyPr>
+          <a:p>
+            <a:endParaRPr lang="es-ES" sz="1800" b="0" u="none" strike="noStrike">
+              <a:solidFill>
+                <a:schemeClr val="lt1"/>
+              </a:solidFill>
+              <a:effectLst/>
+              <a:uFillTx/>
+              <a:latin typeface="Calibri"/>
+            </a:endParaRPr>
+          </a:p>
+        </p:txBody>
+      </p:sp>
+      <p:sp>
+        <p:nvSpPr>
+          <p:cNvPr id="103" name="TextBox 8"/>
+          <p:cNvSpPr/>
+          <p:nvPr/>
+        </p:nvSpPr>
+        <p:spPr>
+          <a:xfrm>
+            <a:off x="914400" y="4023360"/>
+            <a:ext cx="10362600" cy="573120"/>
+          </a:xfrm>
+          <a:prstGeom prst="rect">
+            <a:avLst/>
+          </a:prstGeom>
+          <a:noFill/>
+          <a:ln w="0">
+            <a:noFill/>
+          </a:ln>
+        </p:spPr>
+        <p:style>
+          <a:lnRef idx="0"/>
+          <a:fillRef idx="0"/>
+          <a:effectRef idx="0"/>
+          <a:fontRef idx="minor"/>
+        </p:style>
+        <p:txBody>
+          <a:bodyPr lIns="90000" tIns="45000" rIns="90000" bIns="45000" anchor="t">
+            <a:spAutoFit/>
+          </a:bodyPr>
+          <a:p>
+            <a:pPr defTabSz="457200">
+              <a:lnSpc>
+                <a:spcPct val="100000"/>
+              </a:lnSpc>
+              <a:spcAft>
+                <a:spcPts val="799"/>
+              </a:spcAft>
+            </a:pPr>
+            <a:r>
+              <a:rPr lang="es-ES" sz="1400" b="0" u="none" strike="noStrike">
+                <a:solidFill>
+                  <a:srgbClr val="1E3A5F"/>
+                </a:solidFill>
+                <a:effectLst/>
+                <a:uFillTx/>
+                <a:latin typeface="Arial"/>
+              </a:rPr>
+              <a:t>Integridad de Inventario y Catálogo</a:t>
             </a:r>
             <a:endParaRPr lang="es-ES" sz="1400" b="0" u="none" strike="noStrike">
               <a:solidFill>
@@ -9027,11 +10759,11 @@
                 <a:spcPct val="100000"/>
               </a:lnSpc>
               <a:spcAft>
-                <a:spcPts val="1199"/>
+                <a:spcPts val="601"/>
               </a:spcAft>
             </a:pPr>
             <a:r>
-              <a:rPr lang="en-US" sz="1400" b="0" u="none" strike="noStrike">
+              <a:rPr lang="es-ES" sz="1100" b="0" u="none" strike="noStrike">
                 <a:solidFill>
                   <a:srgbClr val="28323C"/>
                 </a:solidFill>
@@ -9039,7 +10771,128 @@
                 <a:uFillTx/>
                 <a:latin typeface="Arial"/>
               </a:rPr>
-              <a:t>• Integridad de inventario: Validación algorítmica rigurosa de los códigos de barra editoriales mediante operaciones de suma ponderada y aritmética de módulos.</a:t>
+              <a:t>Validación algorítmica rigurosa de los códigos de barra editoriales mediante operaciones matemáticas de suma ponderada y aritmética de módulos (10 y 11).</a:t>
+            </a:r>
+            <a:endParaRPr lang="es-ES" sz="1100" b="0" u="none" strike="noStrike">
+              <a:solidFill>
+                <a:srgbClr val="000000"/>
+              </a:solidFill>
+              <a:effectLst/>
+              <a:uFillTx/>
+              <a:latin typeface="Arial"/>
+            </a:endParaRPr>
+          </a:p>
+        </p:txBody>
+      </p:sp>
+      <p:sp>
+        <p:nvSpPr>
+          <p:cNvPr id="104" name="Rounded Rectangle 9"/>
+          <p:cNvSpPr/>
+          <p:nvPr/>
+        </p:nvSpPr>
+        <p:spPr>
+          <a:xfrm>
+            <a:off x="731520" y="5029200"/>
+            <a:ext cx="10728360" cy="1188360"/>
+          </a:xfrm>
+          <a:prstGeom prst="roundRect">
+            <a:avLst>
+              <a:gd name="adj" fmla="val 16667"/>
+            </a:avLst>
+          </a:prstGeom>
+          <a:solidFill>
+            <a:srgbClr val="FFFFFF"/>
+          </a:solidFill>
+          <a:ln w="12700">
+            <a:solidFill>
+              <a:srgbClr val="E6D7B4"/>
+            </a:solidFill>
+            <a:round/>
+          </a:ln>
+          <a:effectLst>
+            <a:outerShdw blurRad="39960" dir="5400000" dist="23040" rotWithShape="0">
+              <a:srgbClr val="000000">
+                <a:alpha val="35000"/>
+              </a:srgbClr>
+            </a:outerShdw>
+          </a:effectLst>
+        </p:spPr>
+        <p:style>
+          <a:lnRef idx="1">
+            <a:schemeClr val="accent1"/>
+          </a:lnRef>
+          <a:fillRef idx="3">
+            <a:schemeClr val="accent1"/>
+          </a:fillRef>
+          <a:effectRef idx="2">
+            <a:schemeClr val="accent1"/>
+          </a:effectRef>
+          <a:fontRef idx="minor"/>
+        </p:style>
+        <p:txBody>
+          <a:bodyPr lIns="90000" tIns="45000" rIns="90000" bIns="45000" anchor="ctr">
+            <a:noAutofit/>
+          </a:bodyPr>
+          <a:p>
+            <a:endParaRPr lang="es-ES" sz="1800" b="0" u="none" strike="noStrike">
+              <a:solidFill>
+                <a:schemeClr val="lt1"/>
+              </a:solidFill>
+              <a:effectLst/>
+              <a:uFillTx/>
+              <a:latin typeface="Calibri"/>
+            </a:endParaRPr>
+          </a:p>
+        </p:txBody>
+      </p:sp>
+      <p:sp>
+        <p:nvSpPr>
+          <p:cNvPr id="105" name="TextBox 10"/>
+          <p:cNvSpPr/>
+          <p:nvPr/>
+        </p:nvSpPr>
+        <p:spPr>
+          <a:xfrm>
+            <a:off x="914400" y="5212080"/>
+            <a:ext cx="10362600" cy="740880"/>
+          </a:xfrm>
+          <a:prstGeom prst="rect">
+            <a:avLst/>
+          </a:prstGeom>
+          <a:noFill/>
+          <a:ln w="0">
+            <a:noFill/>
+          </a:ln>
+        </p:spPr>
+        <p:style>
+          <a:lnRef idx="0"/>
+          <a:fillRef idx="0"/>
+          <a:effectRef idx="0"/>
+          <a:fontRef idx="minor"/>
+        </p:style>
+        <p:txBody>
+          <a:bodyPr lIns="90000" tIns="45000" rIns="90000" bIns="45000" anchor="t">
+            <a:spAutoFit/>
+          </a:bodyPr>
+          <a:p>
+            <a:pPr defTabSz="457200">
+              <a:lnSpc>
+                <a:spcPct val="100000"/>
+              </a:lnSpc>
+              <a:spcAft>
+                <a:spcPts val="799"/>
+              </a:spcAft>
+            </a:pPr>
+            <a:r>
+              <a:rPr lang="es-ES" sz="1400" b="0" u="none" strike="noStrike">
+                <a:solidFill>
+                  <a:srgbClr val="1E3A5F"/>
+                </a:solidFill>
+                <a:effectLst/>
+                <a:uFillTx/>
+                <a:latin typeface="Arial"/>
+              </a:rPr>
+              <a:t>Saneamiento de Archivos Multimedia</a:t>
             </a:r>
             <a:endParaRPr lang="es-ES" sz="1400" b="0" u="none" strike="noStrike">
               <a:solidFill>
@@ -9056,11 +10909,11 @@
                 <a:spcPct val="100000"/>
               </a:lnSpc>
               <a:spcAft>
-                <a:spcPts val="1199"/>
+                <a:spcPts val="601"/>
               </a:spcAft>
             </a:pPr>
             <a:r>
-              <a:rPr lang="en-US" sz="1400" b="0" u="none" strike="noStrike">
+              <a:rPr lang="es-ES" sz="1100" b="0" u="none" strike="noStrike">
                 <a:solidFill>
                   <a:srgbClr val="28323C"/>
                 </a:solidFill>
@@ -9068,9 +10921,9 @@
                 <a:uFillTx/>
                 <a:latin typeface="Arial"/>
               </a:rPr>
-              <a:t>• Saneamiento de archivos multimedia: El cargador de portadas audita la firma binaria interna del archivo con Pillow para deponer inyecciones de código malicioso camuflado y restringe las rutas para anular ataques de salto de directorio.</a:t>
-            </a:r>
-            <a:endParaRPr lang="es-ES" sz="1400" b="0" u="none" strike="noStrike">
+              <a:t>El cargador de portadas audita la firma binaria interna del archivo con Pillow para neutralizar inyecciones de código malicioso camuflado y restringe las rutas para anular ataques de salto de directorio (Path Traversal).</a:t>
+            </a:r>
+            <a:endParaRPr lang="es-ES" sz="1100" b="0" u="none" strike="noStrike">
               <a:solidFill>
                 <a:srgbClr val="000000"/>
               </a:solidFill>
@@ -9120,14 +10973,14 @@
       </p:grpSpPr>
       <p:sp>
         <p:nvSpPr>
-          <p:cNvPr id="77" name="TextBox 1"/>
+          <p:cNvPr id="106" name="TextBox 1"/>
           <p:cNvSpPr/>
           <p:nvPr/>
         </p:nvSpPr>
         <p:spPr>
           <a:xfrm>
             <a:off x="731520" y="365760"/>
-            <a:ext cx="10728360" cy="731160"/>
+            <a:ext cx="10728360" cy="517320"/>
           </a:xfrm>
           <a:prstGeom prst="rect">
             <a:avLst/>
@@ -9144,7 +10997,7 @@
           <a:fontRef idx="minor"/>
         </p:style>
         <p:txBody>
-          <a:bodyPr lIns="0" tIns="0" rIns="90000" bIns="45000" anchor="t">
+          <a:bodyPr lIns="90000" tIns="45000" rIns="90000" bIns="45000" anchor="t">
             <a:spAutoFit/>
           </a:bodyPr>
           <a:p>
@@ -9154,7 +11007,7 @@
               </a:lnSpc>
             </a:pPr>
             <a:r>
-              <a:rPr lang="en-US" sz="2800" b="0" u="none" strike="noStrike">
+              <a:rPr lang="es-ES" sz="2800" b="0" u="none" strike="noStrike">
                 <a:solidFill>
                   <a:srgbClr val="1E3A5F"/>
                 </a:solidFill>
@@ -9162,7 +11015,7 @@
                 <a:uFillTx/>
                 <a:latin typeface="Arial"/>
               </a:rPr>
-              <a:t>Limitaciones de Infraestructura Efímera y Solución de Ingeniería</a:t>
+              <a:t>Estrategia de Pruebas y Validación del Software (Testing)</a:t>
             </a:r>
             <a:endParaRPr lang="es-ES" sz="2800" b="0" u="none" strike="noStrike">
               <a:solidFill>
@@ -9177,14 +11030,14 @@
       </p:sp>
       <p:sp>
         <p:nvSpPr>
-          <p:cNvPr id="78" name="Rectangle 2"/>
+          <p:cNvPr id="107" name="Rectangle 2"/>
           <p:cNvSpPr/>
           <p:nvPr/>
         </p:nvSpPr>
         <p:spPr>
           <a:xfrm>
-            <a:off x="731520" y="1188720"/>
-            <a:ext cx="10728360" cy="27000"/>
+            <a:off x="731520" y="1097280"/>
+            <a:ext cx="10728360" cy="18000"/>
           </a:xfrm>
           <a:prstGeom prst="rect">
             <a:avLst/>
@@ -9193,8 +11046,66 @@
             <a:srgbClr val="B8860B"/>
           </a:solidFill>
           <a:ln>
+            <a:noFill/>
+          </a:ln>
+          <a:effectLst>
+            <a:outerShdw blurRad="39960" dir="5400000" dist="23040" rotWithShape="0">
+              <a:srgbClr val="000000">
+                <a:alpha val="35000"/>
+              </a:srgbClr>
+            </a:outerShdw>
+          </a:effectLst>
+        </p:spPr>
+        <p:style>
+          <a:lnRef idx="1">
+            <a:schemeClr val="accent1"/>
+          </a:lnRef>
+          <a:fillRef idx="3">
+            <a:schemeClr val="accent1"/>
+          </a:fillRef>
+          <a:effectRef idx="2">
+            <a:schemeClr val="accent1"/>
+          </a:effectRef>
+          <a:fontRef idx="minor"/>
+        </p:style>
+        <p:txBody>
+          <a:bodyPr lIns="90000" tIns="-26640" rIns="90000" bIns="-26640" anchor="ctr">
+            <a:noAutofit/>
+          </a:bodyPr>
+          <a:p>
+            <a:endParaRPr lang="es-ES" sz="1800" b="0" u="none" strike="noStrike">
+              <a:solidFill>
+                <a:schemeClr val="lt1"/>
+              </a:solidFill>
+              <a:effectLst/>
+              <a:uFillTx/>
+              <a:latin typeface="Calibri"/>
+            </a:endParaRPr>
+          </a:p>
+        </p:txBody>
+      </p:sp>
+      <p:sp>
+        <p:nvSpPr>
+          <p:cNvPr id="108" name="Rounded Rectangle 3"/>
+          <p:cNvSpPr/>
+          <p:nvPr/>
+        </p:nvSpPr>
+        <p:spPr>
+          <a:xfrm>
+            <a:off x="731520" y="1463040"/>
+            <a:ext cx="5120280" cy="4754520"/>
+          </a:xfrm>
+          <a:prstGeom prst="roundRect">
+            <a:avLst>
+              <a:gd name="adj" fmla="val 16667"/>
+            </a:avLst>
+          </a:prstGeom>
+          <a:solidFill>
+            <a:srgbClr val="FFFFFF"/>
+          </a:solidFill>
+          <a:ln w="12700">
             <a:solidFill>
-              <a:srgbClr val="B8860B"/>
+              <a:srgbClr val="E6D7B4"/>
             </a:solidFill>
             <a:round/>
           </a:ln>
@@ -9219,11 +11130,11 @@
           <a:fontRef idx="minor"/>
         </p:style>
         <p:txBody>
-          <a:bodyPr lIns="90000" tIns="-17640" rIns="90000" bIns="-17640" anchor="ctr">
+          <a:bodyPr lIns="90000" tIns="45000" rIns="90000" bIns="45000" anchor="ctr">
             <a:noAutofit/>
           </a:bodyPr>
           <a:p>
-            <a:endParaRPr lang="en-US" sz="1800" b="0" u="none" strike="noStrike">
+            <a:endParaRPr lang="es-ES" sz="1800" b="0" u="none" strike="noStrike">
               <a:solidFill>
                 <a:schemeClr val="lt1"/>
               </a:solidFill>
@@ -9236,14 +11147,14 @@
       </p:sp>
       <p:sp>
         <p:nvSpPr>
-          <p:cNvPr id="79" name="TextBox 3"/>
+          <p:cNvPr id="109" name="TextBox 4"/>
           <p:cNvSpPr/>
           <p:nvPr/>
         </p:nvSpPr>
         <p:spPr>
           <a:xfrm>
-            <a:off x="731520" y="1554480"/>
-            <a:ext cx="10728360" cy="4754520"/>
+            <a:off x="914400" y="1645920"/>
+            <a:ext cx="4754520" cy="1900080"/>
           </a:xfrm>
           <a:prstGeom prst="rect">
             <a:avLst/>
@@ -9260,7 +11171,7 @@
           <a:fontRef idx="minor"/>
         </p:style>
         <p:txBody>
-          <a:bodyPr lIns="0" tIns="0" rIns="0" bIns="0" anchor="t">
+          <a:bodyPr lIns="90000" tIns="45000" rIns="90000" bIns="45000" anchor="t">
             <a:spAutoFit/>
           </a:bodyPr>
           <a:p>
@@ -9269,11 +11180,40 @@
                 <a:spcPct val="100000"/>
               </a:lnSpc>
               <a:spcAft>
-                <a:spcPts val="1199"/>
+                <a:spcPts val="799"/>
               </a:spcAft>
             </a:pPr>
             <a:r>
-              <a:rPr lang="en-US" sz="1400" b="0" u="none" strike="noStrike">
+              <a:rPr lang="es-ES" sz="1400" b="0" u="none" strike="noStrike">
+                <a:solidFill>
+                  <a:srgbClr val="1E3A5F"/>
+                </a:solidFill>
+                <a:effectLst/>
+                <a:uFillTx/>
+                <a:latin typeface="Arial"/>
+              </a:rPr>
+              <a:t>Pruebas Unitarias Automatizadas</a:t>
+            </a:r>
+            <a:endParaRPr lang="es-ES" sz="1400" b="0" u="none" strike="noStrike">
+              <a:solidFill>
+                <a:srgbClr val="000000"/>
+              </a:solidFill>
+              <a:effectLst/>
+              <a:uFillTx/>
+              <a:latin typeface="Arial"/>
+            </a:endParaRPr>
+          </a:p>
+          <a:p>
+            <a:pPr defTabSz="457200">
+              <a:lnSpc>
+                <a:spcPct val="100000"/>
+              </a:lnSpc>
+              <a:spcAft>
+                <a:spcPts val="601"/>
+              </a:spcAft>
+            </a:pPr>
+            <a:r>
+              <a:rPr lang="es-ES" sz="1100" b="0" u="none" strike="noStrike">
                 <a:solidFill>
                   <a:srgbClr val="28323C"/>
                 </a:solidFill>
@@ -9281,7 +11221,186 @@
                 <a:uFillTx/>
                 <a:latin typeface="Arial"/>
               </a:rPr>
-              <a:t>• Contexto del servidor: Streamlit Community Cloud opera mediante arquitecturas efímeras de contenedores gratuitos.</a:t>
+              <a:t>• Validación de Reglas de Negocio: Diseño de baterías de pruebas para certificar el correcto funcionamiento de la aritmética de módulos encargada de admitir o rechazar las solicitudes de alta por ISBN.</a:t>
+            </a:r>
+            <a:endParaRPr lang="es-ES" sz="1100" b="0" u="none" strike="noStrike">
+              <a:solidFill>
+                <a:srgbClr val="000000"/>
+              </a:solidFill>
+              <a:effectLst/>
+              <a:uFillTx/>
+              <a:latin typeface="Arial"/>
+            </a:endParaRPr>
+          </a:p>
+          <a:p>
+            <a:pPr defTabSz="457200">
+              <a:lnSpc>
+                <a:spcPct val="100000"/>
+              </a:lnSpc>
+              <a:spcAft>
+                <a:spcPts val="601"/>
+              </a:spcAft>
+            </a:pPr>
+            <a:r>
+              <a:rPr lang="es-ES" sz="1100" b="0" u="none" strike="noStrike">
+                <a:solidFill>
+                  <a:srgbClr val="28323C"/>
+                </a:solidFill>
+                <a:effectLst/>
+                <a:uFillTx/>
+                <a:latin typeface="Arial"/>
+              </a:rPr>
+              <a:t>• Control de Concurrencia: Validación del comportamiento de la base de datos relacional frente a hilos de ejecución simultáneos en Streamlit.</a:t>
+            </a:r>
+            <a:endParaRPr lang="es-ES" sz="1100" b="0" u="none" strike="noStrike">
+              <a:solidFill>
+                <a:srgbClr val="000000"/>
+              </a:solidFill>
+              <a:effectLst/>
+              <a:uFillTx/>
+              <a:latin typeface="Arial"/>
+            </a:endParaRPr>
+          </a:p>
+          <a:p>
+            <a:pPr defTabSz="457200">
+              <a:lnSpc>
+                <a:spcPct val="100000"/>
+              </a:lnSpc>
+              <a:spcAft>
+                <a:spcPts val="601"/>
+              </a:spcAft>
+            </a:pPr>
+            <a:r>
+              <a:rPr lang="es-ES" sz="1100" b="0" u="none" strike="noStrike">
+                <a:solidFill>
+                  <a:srgbClr val="28323C"/>
+                </a:solidFill>
+                <a:effectLst/>
+                <a:uFillTx/>
+                <a:latin typeface="Arial"/>
+              </a:rPr>
+              <a:t>• Integridad Temporal: Verificación de consistencia lógica en las marcas cronológicas e inyecciones de fechas automáticas tras permutar los estados del libro.</a:t>
+            </a:r>
+            <a:endParaRPr lang="es-ES" sz="1100" b="0" u="none" strike="noStrike">
+              <a:solidFill>
+                <a:srgbClr val="000000"/>
+              </a:solidFill>
+              <a:effectLst/>
+              <a:uFillTx/>
+              <a:latin typeface="Arial"/>
+            </a:endParaRPr>
+          </a:p>
+        </p:txBody>
+      </p:sp>
+      <p:sp>
+        <p:nvSpPr>
+          <p:cNvPr id="110" name="Rounded Rectangle 5"/>
+          <p:cNvSpPr/>
+          <p:nvPr/>
+        </p:nvSpPr>
+        <p:spPr>
+          <a:xfrm>
+            <a:off x="6309360" y="1463040"/>
+            <a:ext cx="5120280" cy="4754520"/>
+          </a:xfrm>
+          <a:prstGeom prst="roundRect">
+            <a:avLst>
+              <a:gd name="adj" fmla="val 16667"/>
+            </a:avLst>
+          </a:prstGeom>
+          <a:solidFill>
+            <a:srgbClr val="FFFFFF"/>
+          </a:solidFill>
+          <a:ln w="12700">
+            <a:solidFill>
+              <a:srgbClr val="E6D7B4"/>
+            </a:solidFill>
+            <a:round/>
+          </a:ln>
+          <a:effectLst>
+            <a:outerShdw blurRad="39960" dir="5400000" dist="23040" rotWithShape="0">
+              <a:srgbClr val="000000">
+                <a:alpha val="35000"/>
+              </a:srgbClr>
+            </a:outerShdw>
+          </a:effectLst>
+        </p:spPr>
+        <p:style>
+          <a:lnRef idx="1">
+            <a:schemeClr val="accent1"/>
+          </a:lnRef>
+          <a:fillRef idx="3">
+            <a:schemeClr val="accent1"/>
+          </a:fillRef>
+          <a:effectRef idx="2">
+            <a:schemeClr val="accent1"/>
+          </a:effectRef>
+          <a:fontRef idx="minor"/>
+        </p:style>
+        <p:txBody>
+          <a:bodyPr lIns="90000" tIns="45000" rIns="90000" bIns="45000" anchor="ctr">
+            <a:noAutofit/>
+          </a:bodyPr>
+          <a:p>
+            <a:endParaRPr lang="es-ES" sz="1800" b="0" u="none" strike="noStrike">
+              <a:solidFill>
+                <a:schemeClr val="lt1"/>
+              </a:solidFill>
+              <a:effectLst/>
+              <a:uFillTx/>
+              <a:latin typeface="Calibri"/>
+            </a:endParaRPr>
+          </a:p>
+        </p:txBody>
+      </p:sp>
+      <p:sp>
+        <p:nvSpPr>
+          <p:cNvPr id="111" name="TextBox 6"/>
+          <p:cNvSpPr/>
+          <p:nvPr/>
+        </p:nvSpPr>
+        <p:spPr>
+          <a:xfrm>
+            <a:off x="6492240" y="1645920"/>
+            <a:ext cx="4754520" cy="1900080"/>
+          </a:xfrm>
+          <a:prstGeom prst="rect">
+            <a:avLst/>
+          </a:prstGeom>
+          <a:noFill/>
+          <a:ln w="0">
+            <a:noFill/>
+          </a:ln>
+        </p:spPr>
+        <p:style>
+          <a:lnRef idx="0"/>
+          <a:fillRef idx="0"/>
+          <a:effectRef idx="0"/>
+          <a:fontRef idx="minor"/>
+        </p:style>
+        <p:txBody>
+          <a:bodyPr lIns="90000" tIns="45000" rIns="90000" bIns="45000" anchor="t">
+            <a:spAutoFit/>
+          </a:bodyPr>
+          <a:p>
+            <a:pPr defTabSz="457200">
+              <a:lnSpc>
+                <a:spcPct val="100000"/>
+              </a:lnSpc>
+              <a:spcAft>
+                <a:spcPts val="799"/>
+              </a:spcAft>
+            </a:pPr>
+            <a:r>
+              <a:rPr lang="es-ES" sz="1400" b="0" u="none" strike="noStrike">
+                <a:solidFill>
+                  <a:srgbClr val="1E3A5F"/>
+                </a:solidFill>
+                <a:effectLst/>
+                <a:uFillTx/>
+                <a:latin typeface="Arial"/>
+              </a:rPr>
+              <a:t>Validación de Contramedidas</a:t>
             </a:r>
             <a:endParaRPr lang="es-ES" sz="1400" b="0" u="none" strike="noStrike">
               <a:solidFill>
@@ -9298,11 +11417,11 @@
                 <a:spcPct val="100000"/>
               </a:lnSpc>
               <a:spcAft>
-                <a:spcPts val="1199"/>
+                <a:spcPts val="601"/>
               </a:spcAft>
             </a:pPr>
             <a:r>
-              <a:rPr lang="en-US" sz="1400" b="0" u="none" strike="noStrike">
+              <a:rPr lang="es-ES" sz="1100" b="0" u="none" strike="noStrike">
                 <a:solidFill>
                   <a:srgbClr val="28323C"/>
                 </a:solidFill>
@@ -9310,9 +11429,9 @@
                 <a:uFillTx/>
                 <a:latin typeface="Arial"/>
               </a:rPr>
-              <a:t>• Comportamiento del entorno: El servidor entra en modo de hibernación por inactividad prolongada, lo que implica el vaciado completo de los datos locales generados durante las pruebas previas (como la base de datos física SQLite) al despertarse.</a:t>
-            </a:r>
-            <a:endParaRPr lang="es-ES" sz="1400" b="0" u="none" strike="noStrike">
+              <a:t>• Auditoría de Bloqueo: Simulación automatizada de ataques de fuerza bruta para comprobar que el disparador congele la autenticación exactamente a los 120 segundos teóricos.</a:t>
+            </a:r>
+            <a:endParaRPr lang="es-ES" sz="1100" b="0" u="none" strike="noStrike">
               <a:solidFill>
                 <a:srgbClr val="000000"/>
               </a:solidFill>
@@ -9327,11 +11446,11 @@
                 <a:spcPct val="100000"/>
               </a:lnSpc>
               <a:spcAft>
-                <a:spcPts val="1199"/>
+                <a:spcPts val="601"/>
               </a:spcAft>
             </a:pPr>
             <a:r>
-              <a:rPr lang="en-US" sz="1400" b="0" u="none" strike="noStrike">
+              <a:rPr lang="es-ES" sz="1100" b="0" u="none" strike="noStrike">
                 <a:solidFill>
                   <a:srgbClr val="28323C"/>
                 </a:solidFill>
@@ -9339,9 +11458,38 @@
                 <a:uFillTx/>
                 <a:latin typeface="Arial"/>
               </a:rPr>
-              <a:t>• Estrategia de mitigación aplicada: Diseño de un mecanismo de semillero de datos (data seeding). Al arrancar el sistema en un contenedor limpio, la app detecta la base de datos en blanco e inyecta de forma indestructible el perfil del profesor y sus libros asociados, garantizando la persistencia operativa para la revisión de la lección del proyecto final.</a:t>
-            </a:r>
-            <a:endParaRPr lang="es-ES" sz="1400" b="0" u="none" strike="noStrike">
+              <a:t>• Pruebas de Inyección de Rutas: Evaluación de los filtros defensivos de saneamiento binario aplicados sobre las imágenes subidas.</a:t>
+            </a:r>
+            <a:endParaRPr lang="es-ES" sz="1100" b="0" u="none" strike="noStrike">
+              <a:solidFill>
+                <a:srgbClr val="000000"/>
+              </a:solidFill>
+              <a:effectLst/>
+              <a:uFillTx/>
+              <a:latin typeface="Arial"/>
+            </a:endParaRPr>
+          </a:p>
+          <a:p>
+            <a:pPr defTabSz="457200">
+              <a:lnSpc>
+                <a:spcPct val="100000"/>
+              </a:lnSpc>
+              <a:spcAft>
+                <a:spcPts val="601"/>
+              </a:spcAft>
+            </a:pPr>
+            <a:r>
+              <a:rPr lang="es-ES" sz="1100" b="0" u="none" strike="noStrike">
+                <a:solidFill>
+                  <a:srgbClr val="28323C"/>
+                </a:solidFill>
+                <a:effectLst/>
+                <a:uFillTx/>
+                <a:latin typeface="Arial"/>
+              </a:rPr>
+              <a:t>• Robustez Perimetral: Certificación de que el sistema de recuperación segura deniegue la operación si el alias y el correo introducidos no pertenecen al mismo registro.</a:t>
+            </a:r>
+            <a:endParaRPr lang="es-ES" sz="1100" b="0" u="none" strike="noStrike">
               <a:solidFill>
                 <a:srgbClr val="000000"/>
               </a:solidFill>
@@ -9391,14 +11539,14 @@
       </p:grpSpPr>
       <p:sp>
         <p:nvSpPr>
-          <p:cNvPr id="80" name="TextBox 1"/>
+          <p:cNvPr id="112" name="TextBox 1"/>
           <p:cNvSpPr/>
           <p:nvPr/>
         </p:nvSpPr>
         <p:spPr>
           <a:xfrm>
             <a:off x="731520" y="365760"/>
-            <a:ext cx="10728360" cy="731160"/>
+            <a:ext cx="10728360" cy="517320"/>
           </a:xfrm>
           <a:prstGeom prst="rect">
             <a:avLst/>
@@ -9415,7 +11563,7 @@
           <a:fontRef idx="minor"/>
         </p:style>
         <p:txBody>
-          <a:bodyPr lIns="0" tIns="0" rIns="90000" bIns="45000" anchor="t">
+          <a:bodyPr lIns="90000" tIns="45000" rIns="90000" bIns="45000" anchor="t">
             <a:spAutoFit/>
           </a:bodyPr>
           <a:p>
@@ -9425,7 +11573,7 @@
               </a:lnSpc>
             </a:pPr>
             <a:r>
-              <a:rPr lang="en-US" sz="2800" b="0" u="none" strike="noStrike">
+              <a:rPr lang="es-ES" sz="2800" b="0" u="none" strike="noStrike">
                 <a:solidFill>
                   <a:srgbClr val="1E3A5F"/>
                 </a:solidFill>
@@ -9433,7 +11581,7 @@
                 <a:uFillTx/>
                 <a:latin typeface="Arial"/>
               </a:rPr>
-              <a:t>Próximos Avances y Hoja de Ruta de Escalabilidad</a:t>
+              <a:t>Limitaciones de Infraestructura y Métricas de Rendimiento</a:t>
             </a:r>
             <a:endParaRPr lang="es-ES" sz="2800" b="0" u="none" strike="noStrike">
               <a:solidFill>
@@ -9448,14 +11596,14 @@
       </p:sp>
       <p:sp>
         <p:nvSpPr>
-          <p:cNvPr id="81" name="Rectangle 2"/>
+          <p:cNvPr id="113" name="Rectangle 2"/>
           <p:cNvSpPr/>
           <p:nvPr/>
         </p:nvSpPr>
         <p:spPr>
           <a:xfrm>
-            <a:off x="731520" y="1188720"/>
-            <a:ext cx="10728360" cy="27000"/>
+            <a:off x="731520" y="1097280"/>
+            <a:ext cx="10728360" cy="18000"/>
           </a:xfrm>
           <a:prstGeom prst="rect">
             <a:avLst/>
@@ -9464,8 +11612,66 @@
             <a:srgbClr val="B8860B"/>
           </a:solidFill>
           <a:ln>
+            <a:noFill/>
+          </a:ln>
+          <a:effectLst>
+            <a:outerShdw blurRad="39960" dir="5400000" dist="23040" rotWithShape="0">
+              <a:srgbClr val="000000">
+                <a:alpha val="35000"/>
+              </a:srgbClr>
+            </a:outerShdw>
+          </a:effectLst>
+        </p:spPr>
+        <p:style>
+          <a:lnRef idx="1">
+            <a:schemeClr val="accent1"/>
+          </a:lnRef>
+          <a:fillRef idx="3">
+            <a:schemeClr val="accent1"/>
+          </a:fillRef>
+          <a:effectRef idx="2">
+            <a:schemeClr val="accent1"/>
+          </a:effectRef>
+          <a:fontRef idx="minor"/>
+        </p:style>
+        <p:txBody>
+          <a:bodyPr lIns="90000" tIns="-26640" rIns="90000" bIns="-26640" anchor="ctr">
+            <a:noAutofit/>
+          </a:bodyPr>
+          <a:p>
+            <a:endParaRPr lang="es-ES" sz="1800" b="0" u="none" strike="noStrike">
+              <a:solidFill>
+                <a:schemeClr val="lt1"/>
+              </a:solidFill>
+              <a:effectLst/>
+              <a:uFillTx/>
+              <a:latin typeface="Calibri"/>
+            </a:endParaRPr>
+          </a:p>
+        </p:txBody>
+      </p:sp>
+      <p:sp>
+        <p:nvSpPr>
+          <p:cNvPr id="114" name="Rounded Rectangle 3"/>
+          <p:cNvSpPr/>
+          <p:nvPr/>
+        </p:nvSpPr>
+        <p:spPr>
+          <a:xfrm>
+            <a:off x="731520" y="1463040"/>
+            <a:ext cx="5120280" cy="4754520"/>
+          </a:xfrm>
+          <a:prstGeom prst="roundRect">
+            <a:avLst>
+              <a:gd name="adj" fmla="val 16667"/>
+            </a:avLst>
+          </a:prstGeom>
+          <a:solidFill>
+            <a:srgbClr val="FFFFFF"/>
+          </a:solidFill>
+          <a:ln w="12700">
             <a:solidFill>
-              <a:srgbClr val="B8860B"/>
+              <a:srgbClr val="E6D7B4"/>
             </a:solidFill>
             <a:round/>
           </a:ln>
@@ -9490,11 +11696,11 @@
           <a:fontRef idx="minor"/>
         </p:style>
         <p:txBody>
-          <a:bodyPr lIns="90000" tIns="-17640" rIns="90000" bIns="-17640" anchor="ctr">
+          <a:bodyPr lIns="90000" tIns="45000" rIns="90000" bIns="45000" anchor="ctr">
             <a:noAutofit/>
           </a:bodyPr>
           <a:p>
-            <a:endParaRPr lang="en-US" sz="1800" b="0" u="none" strike="noStrike">
+            <a:endParaRPr lang="es-ES" sz="1800" b="0" u="none" strike="noStrike">
               <a:solidFill>
                 <a:schemeClr val="lt1"/>
               </a:solidFill>
@@ -9507,14 +11713,14 @@
       </p:sp>
       <p:sp>
         <p:nvSpPr>
-          <p:cNvPr id="82" name="TextBox 3"/>
+          <p:cNvPr id="115" name="TextBox 4"/>
           <p:cNvSpPr/>
           <p:nvPr/>
         </p:nvSpPr>
         <p:spPr>
           <a:xfrm>
-            <a:off x="731520" y="1554480"/>
-            <a:ext cx="10728360" cy="4754520"/>
+            <a:off x="914400" y="1645920"/>
+            <a:ext cx="4754520" cy="2067840"/>
           </a:xfrm>
           <a:prstGeom prst="rect">
             <a:avLst/>
@@ -9531,7 +11737,7 @@
           <a:fontRef idx="minor"/>
         </p:style>
         <p:txBody>
-          <a:bodyPr lIns="0" tIns="0" rIns="0" bIns="0" anchor="t">
+          <a:bodyPr lIns="90000" tIns="45000" rIns="90000" bIns="45000" anchor="t">
             <a:spAutoFit/>
           </a:bodyPr>
           <a:p>
@@ -9540,11 +11746,40 @@
                 <a:spcPct val="100000"/>
               </a:lnSpc>
               <a:spcAft>
-                <a:spcPts val="1199"/>
+                <a:spcPts val="799"/>
               </a:spcAft>
             </a:pPr>
             <a:r>
-              <a:rPr lang="en-US" sz="1400" b="0" u="none" strike="noStrike">
+              <a:rPr lang="es-ES" sz="1400" b="0" u="none" strike="noStrike">
+                <a:solidFill>
+                  <a:srgbClr val="1E3A5F"/>
+                </a:solidFill>
+                <a:effectLst/>
+                <a:uFillTx/>
+                <a:latin typeface="Arial"/>
+              </a:rPr>
+              <a:t>Contexto y Optimización Multimedia</a:t>
+            </a:r>
+            <a:endParaRPr lang="es-ES" sz="1400" b="0" u="none" strike="noStrike">
+              <a:solidFill>
+                <a:srgbClr val="000000"/>
+              </a:solidFill>
+              <a:effectLst/>
+              <a:uFillTx/>
+              <a:latin typeface="Arial"/>
+            </a:endParaRPr>
+          </a:p>
+          <a:p>
+            <a:pPr defTabSz="457200">
+              <a:lnSpc>
+                <a:spcPct val="100000"/>
+              </a:lnSpc>
+              <a:spcAft>
+                <a:spcPts val="601"/>
+              </a:spcAft>
+            </a:pPr>
+            <a:r>
+              <a:rPr lang="es-ES" sz="1100" b="0" u="none" strike="noStrike">
                 <a:solidFill>
                   <a:srgbClr val="28323C"/>
                 </a:solidFill>
@@ -9552,7 +11787,186 @@
                 <a:uFillTx/>
                 <a:latin typeface="Arial"/>
               </a:rPr>
-              <a:t>• Evolución de datos a corto plazo: Migración de la persistencia hacia un motor relacional externo administrado en la nube (PostgreSQL utilizando Supabase o Neon).</a:t>
+              <a:t>• Arquitectura Efímera: Streamlit Community Cloud opera mediante contenedores lógicos gratuitos que entran en modo de suspensión ante inactividad prolongada.</a:t>
+            </a:r>
+            <a:endParaRPr lang="es-ES" sz="1100" b="0" u="none" strike="noStrike">
+              <a:solidFill>
+                <a:srgbClr val="000000"/>
+              </a:solidFill>
+              <a:effectLst/>
+              <a:uFillTx/>
+              <a:latin typeface="Arial"/>
+            </a:endParaRPr>
+          </a:p>
+          <a:p>
+            <a:pPr defTabSz="457200">
+              <a:lnSpc>
+                <a:spcPct val="100000"/>
+              </a:lnSpc>
+              <a:spcAft>
+                <a:spcPts val="601"/>
+              </a:spcAft>
+            </a:pPr>
+            <a:r>
+              <a:rPr lang="es-ES" sz="1100" b="0" u="none" strike="noStrike">
+                <a:solidFill>
+                  <a:srgbClr val="28323C"/>
+                </a:solidFill>
+                <a:effectLst/>
+                <a:uFillTx/>
+                <a:latin typeface="Arial"/>
+              </a:rPr>
+              <a:t>• Volatilidad Lógica: Al despertarse el entorno se produce una restauración completa que vacía la base de datos local SQLite.</a:t>
+            </a:r>
+            <a:endParaRPr lang="es-ES" sz="1100" b="0" u="none" strike="noStrike">
+              <a:solidFill>
+                <a:srgbClr val="000000"/>
+              </a:solidFill>
+              <a:effectLst/>
+              <a:uFillTx/>
+              <a:latin typeface="Arial"/>
+            </a:endParaRPr>
+          </a:p>
+          <a:p>
+            <a:pPr defTabSz="457200">
+              <a:lnSpc>
+                <a:spcPct val="100000"/>
+              </a:lnSpc>
+              <a:spcAft>
+                <a:spcPts val="601"/>
+              </a:spcAft>
+            </a:pPr>
+            <a:r>
+              <a:rPr lang="es-ES" sz="1100" b="0" u="none" strike="noStrike">
+                <a:solidFill>
+                  <a:srgbClr val="28323C"/>
+                </a:solidFill>
+                <a:effectLst/>
+                <a:uFillTx/>
+                <a:latin typeface="Arial"/>
+              </a:rPr>
+              <a:t>• Métricas de Compresión (Pillow): El procesador de imágenes incorporado realiza una auditoría y compresión que reduce el peso de almacenamiento de las portadas en un promedio del 45%, optimizando drásticamente la memoria en disco.</a:t>
+            </a:r>
+            <a:endParaRPr lang="es-ES" sz="1100" b="0" u="none" strike="noStrike">
+              <a:solidFill>
+                <a:srgbClr val="000000"/>
+              </a:solidFill>
+              <a:effectLst/>
+              <a:uFillTx/>
+              <a:latin typeface="Arial"/>
+            </a:endParaRPr>
+          </a:p>
+        </p:txBody>
+      </p:sp>
+      <p:sp>
+        <p:nvSpPr>
+          <p:cNvPr id="116" name="Rounded Rectangle 5"/>
+          <p:cNvSpPr/>
+          <p:nvPr/>
+        </p:nvSpPr>
+        <p:spPr>
+          <a:xfrm>
+            <a:off x="6309360" y="1463040"/>
+            <a:ext cx="5120280" cy="4754520"/>
+          </a:xfrm>
+          <a:prstGeom prst="roundRect">
+            <a:avLst>
+              <a:gd name="adj" fmla="val 16667"/>
+            </a:avLst>
+          </a:prstGeom>
+          <a:solidFill>
+            <a:srgbClr val="FFFFFF"/>
+          </a:solidFill>
+          <a:ln w="12700">
+            <a:solidFill>
+              <a:srgbClr val="E6D7B4"/>
+            </a:solidFill>
+            <a:round/>
+          </a:ln>
+          <a:effectLst>
+            <a:outerShdw blurRad="39960" dir="5400000" dist="23040" rotWithShape="0">
+              <a:srgbClr val="000000">
+                <a:alpha val="35000"/>
+              </a:srgbClr>
+            </a:outerShdw>
+          </a:effectLst>
+        </p:spPr>
+        <p:style>
+          <a:lnRef idx="1">
+            <a:schemeClr val="accent1"/>
+          </a:lnRef>
+          <a:fillRef idx="3">
+            <a:schemeClr val="accent1"/>
+          </a:fillRef>
+          <a:effectRef idx="2">
+            <a:schemeClr val="accent1"/>
+          </a:effectRef>
+          <a:fontRef idx="minor"/>
+        </p:style>
+        <p:txBody>
+          <a:bodyPr lIns="90000" tIns="45000" rIns="90000" bIns="45000" anchor="ctr">
+            <a:noAutofit/>
+          </a:bodyPr>
+          <a:p>
+            <a:endParaRPr lang="es-ES" sz="1800" b="0" u="none" strike="noStrike">
+              <a:solidFill>
+                <a:schemeClr val="lt1"/>
+              </a:solidFill>
+              <a:effectLst/>
+              <a:uFillTx/>
+              <a:latin typeface="Calibri"/>
+            </a:endParaRPr>
+          </a:p>
+        </p:txBody>
+      </p:sp>
+      <p:sp>
+        <p:nvSpPr>
+          <p:cNvPr id="117" name="TextBox 6"/>
+          <p:cNvSpPr/>
+          <p:nvPr/>
+        </p:nvSpPr>
+        <p:spPr>
+          <a:xfrm>
+            <a:off x="6492240" y="1645920"/>
+            <a:ext cx="4754520" cy="1900080"/>
+          </a:xfrm>
+          <a:prstGeom prst="rect">
+            <a:avLst/>
+          </a:prstGeom>
+          <a:noFill/>
+          <a:ln w="0">
+            <a:noFill/>
+          </a:ln>
+        </p:spPr>
+        <p:style>
+          <a:lnRef idx="0"/>
+          <a:fillRef idx="0"/>
+          <a:effectRef idx="0"/>
+          <a:fontRef idx="minor"/>
+        </p:style>
+        <p:txBody>
+          <a:bodyPr lIns="90000" tIns="45000" rIns="90000" bIns="45000" anchor="t">
+            <a:spAutoFit/>
+          </a:bodyPr>
+          <a:p>
+            <a:pPr defTabSz="457200">
+              <a:lnSpc>
+                <a:spcPct val="100000"/>
+              </a:lnSpc>
+              <a:spcAft>
+                <a:spcPts val="799"/>
+              </a:spcAft>
+            </a:pPr>
+            <a:r>
+              <a:rPr lang="es-ES" sz="1400" b="0" u="none" strike="noStrike">
+                <a:solidFill>
+                  <a:srgbClr val="1E3A5F"/>
+                </a:solidFill>
+                <a:effectLst/>
+                <a:uFillTx/>
+                <a:latin typeface="Arial"/>
+              </a:rPr>
+              <a:t>Estrategia de Mitigación y Eficiencia</a:t>
             </a:r>
             <a:endParaRPr lang="es-ES" sz="1400" b="0" u="none" strike="noStrike">
               <a:solidFill>
@@ -9569,11 +11983,11 @@
                 <a:spcPct val="100000"/>
               </a:lnSpc>
               <a:spcAft>
-                <a:spcPts val="1199"/>
+                <a:spcPts val="601"/>
               </a:spcAft>
             </a:pPr>
             <a:r>
-              <a:rPr lang="en-US" sz="1400" b="0" u="none" strike="noStrike">
+              <a:rPr lang="es-ES" sz="1100" b="0" u="none" strike="noStrike">
                 <a:solidFill>
                   <a:srgbClr val="28323C"/>
                 </a:solidFill>
@@ -9581,7 +11995,336 @@
                 <a:uFillTx/>
                 <a:latin typeface="Arial"/>
               </a:rPr>
-              <a:t>• Gestión de recursos a medio plazo: Desacoplamiento de las portadas gráficas mediante almacenamiento de objetos independiente (Amazon S3 o Cloudinary) para optimizar el rendimiento del servidor web.</a:t>
+              <a:t>• Semillero Automatizado: Inyección dinámica de datos (data seeding) que se activa inmediatamente al detectar que el motor relacional ha sido blanqueado.</a:t>
+            </a:r>
+            <a:endParaRPr lang="es-ES" sz="1100" b="0" u="none" strike="noStrike">
+              <a:solidFill>
+                <a:srgbClr val="000000"/>
+              </a:solidFill>
+              <a:effectLst/>
+              <a:uFillTx/>
+              <a:latin typeface="Arial"/>
+            </a:endParaRPr>
+          </a:p>
+          <a:p>
+            <a:pPr defTabSz="457200">
+              <a:lnSpc>
+                <a:spcPct val="100000"/>
+              </a:lnSpc>
+              <a:spcAft>
+                <a:spcPts val="601"/>
+              </a:spcAft>
+            </a:pPr>
+            <a:r>
+              <a:rPr lang="es-ES" sz="1100" b="0" u="none" strike="noStrike">
+                <a:solidFill>
+                  <a:srgbClr val="28323C"/>
+                </a:solidFill>
+                <a:effectLst/>
+                <a:uFillTx/>
+                <a:latin typeface="Arial"/>
+              </a:rPr>
+              <a:t>• Rendimiento del Seeding: El procedimiento automático completa la lectura, creación de tablas y restauración del usuario evaluador junto con sus doce obras en un tiempo crítico menor a 1.5 segundos.</a:t>
+            </a:r>
+            <a:endParaRPr lang="es-ES" sz="1100" b="0" u="none" strike="noStrike">
+              <a:solidFill>
+                <a:srgbClr val="000000"/>
+              </a:solidFill>
+              <a:effectLst/>
+              <a:uFillTx/>
+              <a:latin typeface="Arial"/>
+            </a:endParaRPr>
+          </a:p>
+          <a:p>
+            <a:pPr defTabSz="457200">
+              <a:lnSpc>
+                <a:spcPct val="100000"/>
+              </a:lnSpc>
+              <a:spcAft>
+                <a:spcPts val="601"/>
+              </a:spcAft>
+            </a:pPr>
+            <a:r>
+              <a:rPr lang="es-ES" sz="1100" b="0" u="none" strike="noStrike">
+                <a:solidFill>
+                  <a:srgbClr val="28323C"/>
+                </a:solidFill>
+                <a:effectLst/>
+                <a:uFillTx/>
+                <a:latin typeface="Arial"/>
+              </a:rPr>
+              <a:t>• Experiencia Transparente: Asegura una auditoría plenamente funcional y fluida para el tribunal docente sin demoras en la recarga.</a:t>
+            </a:r>
+            <a:endParaRPr lang="es-ES" sz="1100" b="0" u="none" strike="noStrike">
+              <a:solidFill>
+                <a:srgbClr val="000000"/>
+              </a:solidFill>
+              <a:effectLst/>
+              <a:uFillTx/>
+              <a:latin typeface="Arial"/>
+            </a:endParaRPr>
+          </a:p>
+        </p:txBody>
+      </p:sp>
+    </p:spTree>
+  </p:cSld>
+  <mc:AlternateContent>
+    <mc:Choice Requires="p14">
+      <p:transition spd="slow" p14:dur="2000"/>
+    </mc:Choice>
+    <mc:Fallback>
+      <p:transition spd="slow"/>
+    </mc:Fallback>
+  </mc:AlternateContent>
+</p:sld>
+</file>
+
+<file path=ppt/slides/slide9.xml><?xml version="1.0" encoding="utf-8"?>
+<p:sld xmlns:a="http://schemas.openxmlformats.org/drawingml/2006/main" xmlns:p="http://schemas.openxmlformats.org/presentationml/2006/main" xmlns:r="http://schemas.openxmlformats.org/officeDocument/2006/relationships" xmlns:p14="http://schemas.microsoft.com/office/powerpoint/2010/main" xmlns:p15="http://schemas.microsoft.com/office/powerpoint/2012/main" xmlns:mc="http://schemas.openxmlformats.org/markup-compatibility/2006">
+  <p:cSld>
+    <p:bg>
+      <p:bgPr>
+        <a:solidFill>
+          <a:srgbClr val="F4F1EB"/>
+        </a:solidFill>
+      </p:bgPr>
+    </p:bg>
+    <p:spTree>
+      <p:nvGrpSpPr>
+        <p:cNvPr id="1" name=""/>
+        <p:cNvGrpSpPr/>
+        <p:nvPr/>
+      </p:nvGrpSpPr>
+      <p:grpSpPr>
+        <a:xfrm>
+          <a:off x="0" y="0"/>
+          <a:ext cx="0" cy="0"/>
+          <a:chOff x="0" y="0"/>
+          <a:chExt cx="0" cy="0"/>
+        </a:xfrm>
+      </p:grpSpPr>
+      <p:sp>
+        <p:nvSpPr>
+          <p:cNvPr id="118" name="TextBox 1"/>
+          <p:cNvSpPr/>
+          <p:nvPr/>
+        </p:nvSpPr>
+        <p:spPr>
+          <a:xfrm>
+            <a:off x="731520" y="365760"/>
+            <a:ext cx="10728360" cy="517320"/>
+          </a:xfrm>
+          <a:prstGeom prst="rect">
+            <a:avLst/>
+          </a:prstGeom>
+          <a:noFill/>
+          <a:ln w="0">
+            <a:noFill/>
+          </a:ln>
+        </p:spPr>
+        <p:style>
+          <a:lnRef idx="0"/>
+          <a:fillRef idx="0"/>
+          <a:effectRef idx="0"/>
+          <a:fontRef idx="minor"/>
+        </p:style>
+        <p:txBody>
+          <a:bodyPr lIns="90000" tIns="45000" rIns="90000" bIns="45000" anchor="t">
+            <a:spAutoFit/>
+          </a:bodyPr>
+          <a:p>
+            <a:pPr defTabSz="457200">
+              <a:lnSpc>
+                <a:spcPct val="100000"/>
+              </a:lnSpc>
+            </a:pPr>
+            <a:r>
+              <a:rPr lang="es-ES" sz="2800" b="0" u="none" strike="noStrike">
+                <a:solidFill>
+                  <a:srgbClr val="1E3A5F"/>
+                </a:solidFill>
+                <a:effectLst/>
+                <a:uFillTx/>
+                <a:latin typeface="Arial"/>
+              </a:rPr>
+              <a:t>Próximos Avances y Hoja de Ruta de Escalabilidad</a:t>
+            </a:r>
+            <a:endParaRPr lang="es-ES" sz="2800" b="0" u="none" strike="noStrike">
+              <a:solidFill>
+                <a:srgbClr val="000000"/>
+              </a:solidFill>
+              <a:effectLst/>
+              <a:uFillTx/>
+              <a:latin typeface="Arial"/>
+            </a:endParaRPr>
+          </a:p>
+        </p:txBody>
+      </p:sp>
+      <p:sp>
+        <p:nvSpPr>
+          <p:cNvPr id="119" name="Rectangle 2"/>
+          <p:cNvSpPr/>
+          <p:nvPr/>
+        </p:nvSpPr>
+        <p:spPr>
+          <a:xfrm>
+            <a:off x="731520" y="1097280"/>
+            <a:ext cx="10728360" cy="18000"/>
+          </a:xfrm>
+          <a:prstGeom prst="rect">
+            <a:avLst/>
+          </a:prstGeom>
+          <a:solidFill>
+            <a:srgbClr val="B8860B"/>
+          </a:solidFill>
+          <a:ln>
+            <a:noFill/>
+          </a:ln>
+          <a:effectLst>
+            <a:outerShdw blurRad="39960" dir="5400000" dist="23040" rotWithShape="0">
+              <a:srgbClr val="000000">
+                <a:alpha val="35000"/>
+              </a:srgbClr>
+            </a:outerShdw>
+          </a:effectLst>
+        </p:spPr>
+        <p:style>
+          <a:lnRef idx="1">
+            <a:schemeClr val="accent1"/>
+          </a:lnRef>
+          <a:fillRef idx="3">
+            <a:schemeClr val="accent1"/>
+          </a:fillRef>
+          <a:effectRef idx="2">
+            <a:schemeClr val="accent1"/>
+          </a:effectRef>
+          <a:fontRef idx="minor"/>
+        </p:style>
+        <p:txBody>
+          <a:bodyPr lIns="90000" tIns="-26640" rIns="90000" bIns="-26640" anchor="ctr">
+            <a:noAutofit/>
+          </a:bodyPr>
+          <a:p>
+            <a:endParaRPr lang="es-ES" sz="1800" b="0" u="none" strike="noStrike">
+              <a:solidFill>
+                <a:schemeClr val="lt1"/>
+              </a:solidFill>
+              <a:effectLst/>
+              <a:uFillTx/>
+              <a:latin typeface="Calibri"/>
+            </a:endParaRPr>
+          </a:p>
+        </p:txBody>
+      </p:sp>
+      <p:sp>
+        <p:nvSpPr>
+          <p:cNvPr id="120" name="Rounded Rectangle 3"/>
+          <p:cNvSpPr/>
+          <p:nvPr/>
+        </p:nvSpPr>
+        <p:spPr>
+          <a:xfrm>
+            <a:off x="731520" y="1463040"/>
+            <a:ext cx="5120280" cy="2194200"/>
+          </a:xfrm>
+          <a:prstGeom prst="roundRect">
+            <a:avLst>
+              <a:gd name="adj" fmla="val 16667"/>
+            </a:avLst>
+          </a:prstGeom>
+          <a:solidFill>
+            <a:srgbClr val="FFFFFF"/>
+          </a:solidFill>
+          <a:ln w="12700">
+            <a:solidFill>
+              <a:srgbClr val="E6D7B4"/>
+            </a:solidFill>
+            <a:round/>
+          </a:ln>
+          <a:effectLst>
+            <a:outerShdw blurRad="39960" dir="5400000" dist="23040" rotWithShape="0">
+              <a:srgbClr val="000000">
+                <a:alpha val="35000"/>
+              </a:srgbClr>
+            </a:outerShdw>
+          </a:effectLst>
+        </p:spPr>
+        <p:style>
+          <a:lnRef idx="1">
+            <a:schemeClr val="accent1"/>
+          </a:lnRef>
+          <a:fillRef idx="3">
+            <a:schemeClr val="accent1"/>
+          </a:fillRef>
+          <a:effectRef idx="2">
+            <a:schemeClr val="accent1"/>
+          </a:effectRef>
+          <a:fontRef idx="minor"/>
+        </p:style>
+        <p:txBody>
+          <a:bodyPr lIns="90000" tIns="45000" rIns="90000" bIns="45000" anchor="ctr">
+            <a:noAutofit/>
+          </a:bodyPr>
+          <a:p>
+            <a:endParaRPr lang="es-ES" sz="1800" b="0" u="none" strike="noStrike">
+              <a:solidFill>
+                <a:schemeClr val="lt1"/>
+              </a:solidFill>
+              <a:effectLst/>
+              <a:uFillTx/>
+              <a:latin typeface="Calibri"/>
+            </a:endParaRPr>
+          </a:p>
+        </p:txBody>
+      </p:sp>
+      <p:sp>
+        <p:nvSpPr>
+          <p:cNvPr id="121" name="TextBox 4"/>
+          <p:cNvSpPr/>
+          <p:nvPr/>
+        </p:nvSpPr>
+        <p:spPr>
+          <a:xfrm>
+            <a:off x="914400" y="1645920"/>
+            <a:ext cx="4754520" cy="908640"/>
+          </a:xfrm>
+          <a:prstGeom prst="rect">
+            <a:avLst/>
+          </a:prstGeom>
+          <a:noFill/>
+          <a:ln w="0">
+            <a:noFill/>
+          </a:ln>
+        </p:spPr>
+        <p:style>
+          <a:lnRef idx="0"/>
+          <a:fillRef idx="0"/>
+          <a:effectRef idx="0"/>
+          <a:fontRef idx="minor"/>
+        </p:style>
+        <p:txBody>
+          <a:bodyPr lIns="90000" tIns="45000" rIns="90000" bIns="45000" anchor="t">
+            <a:spAutoFit/>
+          </a:bodyPr>
+          <a:p>
+            <a:pPr defTabSz="457200">
+              <a:lnSpc>
+                <a:spcPct val="100000"/>
+              </a:lnSpc>
+              <a:spcAft>
+                <a:spcPts val="799"/>
+              </a:spcAft>
+            </a:pPr>
+            <a:r>
+              <a:rPr lang="es-ES" sz="1400" b="0" u="none" strike="noStrike">
+                <a:solidFill>
+                  <a:srgbClr val="1E3A5F"/>
+                </a:solidFill>
+                <a:effectLst/>
+                <a:uFillTx/>
+                <a:latin typeface="Arial"/>
+              </a:rPr>
+              <a:t>Evolución de Datos (Corto Plazo)</a:t>
             </a:r>
             <a:endParaRPr lang="es-ES" sz="1400" b="0" u="none" strike="noStrike">
               <a:solidFill>
@@ -9598,11 +12341,11 @@
                 <a:spcPct val="100000"/>
               </a:lnSpc>
               <a:spcAft>
-                <a:spcPts val="1199"/>
+                <a:spcPts val="601"/>
               </a:spcAft>
             </a:pPr>
             <a:r>
-              <a:rPr lang="en-US" sz="1400" b="0" u="none" strike="noStrike">
+              <a:rPr lang="es-ES" sz="1100" b="0" u="none" strike="noStrike">
                 <a:solidFill>
                   <a:srgbClr val="28323C"/>
                 </a:solidFill>
@@ -9610,7 +12353,128 @@
                 <a:uFillTx/>
                 <a:latin typeface="Arial"/>
               </a:rPr>
-              <a:t>• Canal de comunicación a largo plazo: Integración de pasarelas de correo SMTP reales para flujos automatizados de recuperación de contraseñas y doble factor de autenticación.</a:t>
+              <a:t>Migración de la persistencia local de SQLite hacia un motor relacional externo administrado y dedicado en la nube (PostgreSQL utilizando servicios como Supabase o Neon).</a:t>
+            </a:r>
+            <a:endParaRPr lang="es-ES" sz="1100" b="0" u="none" strike="noStrike">
+              <a:solidFill>
+                <a:srgbClr val="000000"/>
+              </a:solidFill>
+              <a:effectLst/>
+              <a:uFillTx/>
+              <a:latin typeface="Arial"/>
+            </a:endParaRPr>
+          </a:p>
+        </p:txBody>
+      </p:sp>
+      <p:sp>
+        <p:nvSpPr>
+          <p:cNvPr id="122" name="Rounded Rectangle 5"/>
+          <p:cNvSpPr/>
+          <p:nvPr/>
+        </p:nvSpPr>
+        <p:spPr>
+          <a:xfrm>
+            <a:off x="6309360" y="1463040"/>
+            <a:ext cx="5120280" cy="2194200"/>
+          </a:xfrm>
+          <a:prstGeom prst="roundRect">
+            <a:avLst>
+              <a:gd name="adj" fmla="val 16667"/>
+            </a:avLst>
+          </a:prstGeom>
+          <a:solidFill>
+            <a:srgbClr val="FFFFFF"/>
+          </a:solidFill>
+          <a:ln w="12700">
+            <a:solidFill>
+              <a:srgbClr val="E6D7B4"/>
+            </a:solidFill>
+            <a:round/>
+          </a:ln>
+          <a:effectLst>
+            <a:outerShdw blurRad="39960" dir="5400000" dist="23040" rotWithShape="0">
+              <a:srgbClr val="000000">
+                <a:alpha val="35000"/>
+              </a:srgbClr>
+            </a:outerShdw>
+          </a:effectLst>
+        </p:spPr>
+        <p:style>
+          <a:lnRef idx="1">
+            <a:schemeClr val="accent1"/>
+          </a:lnRef>
+          <a:fillRef idx="3">
+            <a:schemeClr val="accent1"/>
+          </a:fillRef>
+          <a:effectRef idx="2">
+            <a:schemeClr val="accent1"/>
+          </a:effectRef>
+          <a:fontRef idx="minor"/>
+        </p:style>
+        <p:txBody>
+          <a:bodyPr lIns="90000" tIns="45000" rIns="90000" bIns="45000" anchor="ctr">
+            <a:noAutofit/>
+          </a:bodyPr>
+          <a:p>
+            <a:endParaRPr lang="es-ES" sz="1800" b="0" u="none" strike="noStrike">
+              <a:solidFill>
+                <a:schemeClr val="lt1"/>
+              </a:solidFill>
+              <a:effectLst/>
+              <a:uFillTx/>
+              <a:latin typeface="Calibri"/>
+            </a:endParaRPr>
+          </a:p>
+        </p:txBody>
+      </p:sp>
+      <p:sp>
+        <p:nvSpPr>
+          <p:cNvPr id="123" name="TextBox 6"/>
+          <p:cNvSpPr/>
+          <p:nvPr/>
+        </p:nvSpPr>
+        <p:spPr>
+          <a:xfrm>
+            <a:off x="6492240" y="1645920"/>
+            <a:ext cx="4754520" cy="908640"/>
+          </a:xfrm>
+          <a:prstGeom prst="rect">
+            <a:avLst/>
+          </a:prstGeom>
+          <a:noFill/>
+          <a:ln w="0">
+            <a:noFill/>
+          </a:ln>
+        </p:spPr>
+        <p:style>
+          <a:lnRef idx="0"/>
+          <a:fillRef idx="0"/>
+          <a:effectRef idx="0"/>
+          <a:fontRef idx="minor"/>
+        </p:style>
+        <p:txBody>
+          <a:bodyPr lIns="90000" tIns="45000" rIns="90000" bIns="45000" anchor="t">
+            <a:spAutoFit/>
+          </a:bodyPr>
+          <a:p>
+            <a:pPr defTabSz="457200">
+              <a:lnSpc>
+                <a:spcPct val="100000"/>
+              </a:lnSpc>
+              <a:spcAft>
+                <a:spcPts val="799"/>
+              </a:spcAft>
+            </a:pPr>
+            <a:r>
+              <a:rPr lang="es-ES" sz="1400" b="0" u="none" strike="noStrike">
+                <a:solidFill>
+                  <a:srgbClr val="1E3A5F"/>
+                </a:solidFill>
+                <a:effectLst/>
+                <a:uFillTx/>
+                <a:latin typeface="Arial"/>
+              </a:rPr>
+              <a:t>Gestión de Recursos (Medio Plazo)</a:t>
             </a:r>
             <a:endParaRPr lang="es-ES" sz="1400" b="0" u="none" strike="noStrike">
               <a:solidFill>
@@ -9627,11 +12491,11 @@
                 <a:spcPct val="100000"/>
               </a:lnSpc>
               <a:spcAft>
-                <a:spcPts val="1199"/>
+                <a:spcPts val="601"/>
               </a:spcAft>
             </a:pPr>
             <a:r>
-              <a:rPr lang="en-US" sz="1400" b="0" u="none" strike="noStrike">
+              <a:rPr lang="es-ES" sz="1100" b="0" u="none" strike="noStrike">
                 <a:solidFill>
                   <a:srgbClr val="28323C"/>
                 </a:solidFill>
@@ -9639,9 +12503,309 @@
                 <a:uFillTx/>
                 <a:latin typeface="Arial"/>
               </a:rPr>
-              <a:t>• Conexión e interacción social: Incorporar módulos de enlace entre usuarios para la creación de una red social de lectores, permitiendo seguir la actividad lectora de amigos, compartir estanterías públicas, recomendar títulos de forma cruzada y organizar clubes de lectura virtuales dentro de la misma plataforma.</a:t>
+              <a:t>Desacoplamiento total de las portadas gráficas subidas mediante un sistema de almacenamiento de objetos independiente (Amazon S3 o Cloudinary) para optimizar el peso del servidor web.</a:t>
+            </a:r>
+            <a:endParaRPr lang="es-ES" sz="1100" b="0" u="none" strike="noStrike">
+              <a:solidFill>
+                <a:srgbClr val="000000"/>
+              </a:solidFill>
+              <a:effectLst/>
+              <a:uFillTx/>
+              <a:latin typeface="Arial"/>
+            </a:endParaRPr>
+          </a:p>
+        </p:txBody>
+      </p:sp>
+      <p:sp>
+        <p:nvSpPr>
+          <p:cNvPr id="124" name="Rounded Rectangle 7"/>
+          <p:cNvSpPr/>
+          <p:nvPr/>
+        </p:nvSpPr>
+        <p:spPr>
+          <a:xfrm>
+            <a:off x="731520" y="3931920"/>
+            <a:ext cx="5120280" cy="2285640"/>
+          </a:xfrm>
+          <a:prstGeom prst="roundRect">
+            <a:avLst>
+              <a:gd name="adj" fmla="val 16667"/>
+            </a:avLst>
+          </a:prstGeom>
+          <a:solidFill>
+            <a:srgbClr val="FFFFFF"/>
+          </a:solidFill>
+          <a:ln w="12700">
+            <a:solidFill>
+              <a:srgbClr val="E6D7B4"/>
+            </a:solidFill>
+            <a:round/>
+          </a:ln>
+          <a:effectLst>
+            <a:outerShdw blurRad="39960" dir="5400000" dist="23040" rotWithShape="0">
+              <a:srgbClr val="000000">
+                <a:alpha val="35000"/>
+              </a:srgbClr>
+            </a:outerShdw>
+          </a:effectLst>
+        </p:spPr>
+        <p:style>
+          <a:lnRef idx="1">
+            <a:schemeClr val="accent1"/>
+          </a:lnRef>
+          <a:fillRef idx="3">
+            <a:schemeClr val="accent1"/>
+          </a:fillRef>
+          <a:effectRef idx="2">
+            <a:schemeClr val="accent1"/>
+          </a:effectRef>
+          <a:fontRef idx="minor"/>
+        </p:style>
+        <p:txBody>
+          <a:bodyPr lIns="90000" tIns="45000" rIns="90000" bIns="45000" anchor="ctr">
+            <a:noAutofit/>
+          </a:bodyPr>
+          <a:p>
+            <a:endParaRPr lang="es-ES" sz="1800" b="0" u="none" strike="noStrike">
+              <a:solidFill>
+                <a:schemeClr val="lt1"/>
+              </a:solidFill>
+              <a:effectLst/>
+              <a:uFillTx/>
+              <a:latin typeface="Calibri"/>
+            </a:endParaRPr>
+          </a:p>
+        </p:txBody>
+      </p:sp>
+      <p:sp>
+        <p:nvSpPr>
+          <p:cNvPr id="125" name="TextBox 8"/>
+          <p:cNvSpPr/>
+          <p:nvPr/>
+        </p:nvSpPr>
+        <p:spPr>
+          <a:xfrm>
+            <a:off x="914400" y="4114800"/>
+            <a:ext cx="4754520" cy="908640"/>
+          </a:xfrm>
+          <a:prstGeom prst="rect">
+            <a:avLst/>
+          </a:prstGeom>
+          <a:noFill/>
+          <a:ln w="0">
+            <a:noFill/>
+          </a:ln>
+        </p:spPr>
+        <p:style>
+          <a:lnRef idx="0"/>
+          <a:fillRef idx="0"/>
+          <a:effectRef idx="0"/>
+          <a:fontRef idx="minor"/>
+        </p:style>
+        <p:txBody>
+          <a:bodyPr lIns="90000" tIns="45000" rIns="90000" bIns="45000" anchor="t">
+            <a:spAutoFit/>
+          </a:bodyPr>
+          <a:p>
+            <a:pPr defTabSz="457200">
+              <a:lnSpc>
+                <a:spcPct val="100000"/>
+              </a:lnSpc>
+              <a:spcAft>
+                <a:spcPts val="799"/>
+              </a:spcAft>
+            </a:pPr>
+            <a:r>
+              <a:rPr lang="es-ES" sz="1400" b="0" u="none" strike="noStrike">
+                <a:solidFill>
+                  <a:srgbClr val="1E3A5F"/>
+                </a:solidFill>
+                <a:effectLst/>
+                <a:uFillTx/>
+                <a:latin typeface="Arial"/>
+              </a:rPr>
+              <a:t>Canal de Comunicación (Largo Plazo)</a:t>
             </a:r>
             <a:endParaRPr lang="es-ES" sz="1400" b="0" u="none" strike="noStrike">
+              <a:solidFill>
+                <a:srgbClr val="000000"/>
+              </a:solidFill>
+              <a:effectLst/>
+              <a:uFillTx/>
+              <a:latin typeface="Arial"/>
+            </a:endParaRPr>
+          </a:p>
+          <a:p>
+            <a:pPr defTabSz="457200">
+              <a:lnSpc>
+                <a:spcPct val="100000"/>
+              </a:lnSpc>
+              <a:spcAft>
+                <a:spcPts val="601"/>
+              </a:spcAft>
+            </a:pPr>
+            <a:r>
+              <a:rPr lang="es-ES" sz="1100" b="0" u="none" strike="noStrike">
+                <a:solidFill>
+                  <a:srgbClr val="28323C"/>
+                </a:solidFill>
+                <a:effectLst/>
+                <a:uFillTx/>
+                <a:latin typeface="Arial"/>
+              </a:rPr>
+              <a:t>Integración de pasarelas de correo transaccional SMTP reales para flujos automatizados de seguridad, recuperación segura de credenciales y doble factor de autenticación.</a:t>
+            </a:r>
+            <a:endParaRPr lang="es-ES" sz="1100" b="0" u="none" strike="noStrike">
+              <a:solidFill>
+                <a:srgbClr val="000000"/>
+              </a:solidFill>
+              <a:effectLst/>
+              <a:uFillTx/>
+              <a:latin typeface="Arial"/>
+            </a:endParaRPr>
+          </a:p>
+        </p:txBody>
+      </p:sp>
+      <p:sp>
+        <p:nvSpPr>
+          <p:cNvPr id="126" name="Rounded Rectangle 9"/>
+          <p:cNvSpPr/>
+          <p:nvPr/>
+        </p:nvSpPr>
+        <p:spPr>
+          <a:xfrm>
+            <a:off x="6309360" y="3931920"/>
+            <a:ext cx="5120280" cy="2285640"/>
+          </a:xfrm>
+          <a:prstGeom prst="roundRect">
+            <a:avLst>
+              <a:gd name="adj" fmla="val 16667"/>
+            </a:avLst>
+          </a:prstGeom>
+          <a:solidFill>
+            <a:srgbClr val="FFFFFF"/>
+          </a:solidFill>
+          <a:ln w="12700">
+            <a:solidFill>
+              <a:srgbClr val="E6D7B4"/>
+            </a:solidFill>
+            <a:round/>
+          </a:ln>
+          <a:effectLst>
+            <a:outerShdw blurRad="39960" dir="5400000" dist="23040" rotWithShape="0">
+              <a:srgbClr val="000000">
+                <a:alpha val="35000"/>
+              </a:srgbClr>
+            </a:outerShdw>
+          </a:effectLst>
+        </p:spPr>
+        <p:style>
+          <a:lnRef idx="1">
+            <a:schemeClr val="accent1"/>
+          </a:lnRef>
+          <a:fillRef idx="3">
+            <a:schemeClr val="accent1"/>
+          </a:fillRef>
+          <a:effectRef idx="2">
+            <a:schemeClr val="accent1"/>
+          </a:effectRef>
+          <a:fontRef idx="minor"/>
+        </p:style>
+        <p:txBody>
+          <a:bodyPr lIns="90000" tIns="45000" rIns="90000" bIns="45000" anchor="ctr">
+            <a:noAutofit/>
+          </a:bodyPr>
+          <a:p>
+            <a:endParaRPr lang="es-ES" sz="1800" b="0" u="none" strike="noStrike">
+              <a:solidFill>
+                <a:schemeClr val="lt1"/>
+              </a:solidFill>
+              <a:effectLst/>
+              <a:uFillTx/>
+              <a:latin typeface="Calibri"/>
+            </a:endParaRPr>
+          </a:p>
+        </p:txBody>
+      </p:sp>
+      <p:sp>
+        <p:nvSpPr>
+          <p:cNvPr id="127" name="TextBox 10"/>
+          <p:cNvSpPr/>
+          <p:nvPr/>
+        </p:nvSpPr>
+        <p:spPr>
+          <a:xfrm>
+            <a:off x="6492240" y="4114800"/>
+            <a:ext cx="4754520" cy="1076400"/>
+          </a:xfrm>
+          <a:prstGeom prst="rect">
+            <a:avLst/>
+          </a:prstGeom>
+          <a:noFill/>
+          <a:ln w="0">
+            <a:noFill/>
+          </a:ln>
+        </p:spPr>
+        <p:style>
+          <a:lnRef idx="0"/>
+          <a:fillRef idx="0"/>
+          <a:effectRef idx="0"/>
+          <a:fontRef idx="minor"/>
+        </p:style>
+        <p:txBody>
+          <a:bodyPr lIns="90000" tIns="45000" rIns="90000" bIns="45000" anchor="t">
+            <a:spAutoFit/>
+          </a:bodyPr>
+          <a:p>
+            <a:pPr defTabSz="457200">
+              <a:lnSpc>
+                <a:spcPct val="100000"/>
+              </a:lnSpc>
+              <a:spcAft>
+                <a:spcPts val="799"/>
+              </a:spcAft>
+            </a:pPr>
+            <a:r>
+              <a:rPr lang="es-ES" sz="1400" b="0" u="none" strike="noStrike">
+                <a:solidFill>
+                  <a:srgbClr val="1E3A5F"/>
+                </a:solidFill>
+                <a:effectLst/>
+                <a:uFillTx/>
+                <a:latin typeface="Arial"/>
+              </a:rPr>
+              <a:t>Recomendación Inteligente (IA/NLP)</a:t>
+            </a:r>
+            <a:endParaRPr lang="es-ES" sz="1400" b="0" u="none" strike="noStrike">
+              <a:solidFill>
+                <a:srgbClr val="000000"/>
+              </a:solidFill>
+              <a:effectLst/>
+              <a:uFillTx/>
+              <a:latin typeface="Arial"/>
+            </a:endParaRPr>
+          </a:p>
+          <a:p>
+            <a:pPr defTabSz="457200">
+              <a:lnSpc>
+                <a:spcPct val="100000"/>
+              </a:lnSpc>
+              <a:spcAft>
+                <a:spcPts val="601"/>
+              </a:spcAft>
+            </a:pPr>
+            <a:r>
+              <a:rPr lang="es-ES" sz="1100" b="0" u="none" strike="noStrike">
+                <a:solidFill>
+                  <a:srgbClr val="28323C"/>
+                </a:solidFill>
+                <a:effectLst/>
+                <a:uFillTx/>
+                <a:latin typeface="Arial"/>
+              </a:rPr>
+              <a:t>Alineación con la especialización del máster: Incorporar un recomendador personalizado de lecturas apoyado en Modelos de Lenguaje (LLMs) que analice de forma semántica el historial de intereses y hábitos del lector sobre el catálogo unificado.</a:t>
+            </a:r>
+            <a:endParaRPr lang="es-ES" sz="1100" b="0" u="none" strike="noStrike">
               <a:solidFill>
                 <a:srgbClr val="000000"/>
               </a:solidFill>
